--- a/Library.pptx
+++ b/Library.pptx
@@ -11,24 +11,24 @@
     <p:sldId id="259" r:id="rId5"/>
     <p:sldId id="260" r:id="rId6"/>
     <p:sldId id="261" r:id="rId7"/>
-    <p:sldId id="262" r:id="rId8"/>
-    <p:sldId id="264" r:id="rId9"/>
-    <p:sldId id="263" r:id="rId10"/>
-    <p:sldId id="265" r:id="rId11"/>
-    <p:sldId id="266" r:id="rId12"/>
-    <p:sldId id="267" r:id="rId13"/>
-    <p:sldId id="268" r:id="rId14"/>
-    <p:sldId id="269" r:id="rId15"/>
-    <p:sldId id="270" r:id="rId16"/>
-    <p:sldId id="271" r:id="rId17"/>
-    <p:sldId id="272" r:id="rId18"/>
-    <p:sldId id="273" r:id="rId19"/>
-    <p:sldId id="274" r:id="rId20"/>
-    <p:sldId id="276" r:id="rId21"/>
-    <p:sldId id="277" r:id="rId22"/>
-    <p:sldId id="278" r:id="rId23"/>
-    <p:sldId id="279" r:id="rId24"/>
-    <p:sldId id="275" r:id="rId25"/>
+    <p:sldId id="280" r:id="rId8"/>
+    <p:sldId id="262" r:id="rId9"/>
+    <p:sldId id="264" r:id="rId10"/>
+    <p:sldId id="263" r:id="rId11"/>
+    <p:sldId id="265" r:id="rId12"/>
+    <p:sldId id="266" r:id="rId13"/>
+    <p:sldId id="267" r:id="rId14"/>
+    <p:sldId id="268" r:id="rId15"/>
+    <p:sldId id="269" r:id="rId16"/>
+    <p:sldId id="270" r:id="rId17"/>
+    <p:sldId id="271" r:id="rId18"/>
+    <p:sldId id="272" r:id="rId19"/>
+    <p:sldId id="273" r:id="rId20"/>
+    <p:sldId id="274" r:id="rId21"/>
+    <p:sldId id="276" r:id="rId22"/>
+    <p:sldId id="277" r:id="rId23"/>
+    <p:sldId id="278" r:id="rId24"/>
+    <p:sldId id="279" r:id="rId25"/>
   </p:sldIdLst>
   <p:sldSz cx="12192000" cy="6858000"/>
   <p:notesSz cx="6858000" cy="9144000"/>
@@ -133,50 +133,6 @@
     </p:ext>
   </p:extLst>
 </p:presentation>
-</file>
-
-<file path=ppt/changesInfos/changesInfo1.xml><?xml version="1.0" encoding="utf-8"?>
-<pc:chgInfo xmlns:a="http://schemas.openxmlformats.org/drawingml/2006/main" xmlns:r="http://schemas.openxmlformats.org/officeDocument/2006/relationships" xmlns:ac="http://schemas.microsoft.com/office/drawing/2013/main/command" xmlns:pc="http://schemas.microsoft.com/office/powerpoint/2013/main/command">
-  <pc:docChgLst>
-    <pc:chgData name="Srilekha Chundu" userId="49a084bb-9a89-4e71-84e0-8baa9b883932" providerId="ADAL" clId="{FFAA7A55-6EDE-408F-B9B3-D3DCD33309A1}"/>
-    <pc:docChg chg="modSld">
-      <pc:chgData name="Srilekha Chundu" userId="49a084bb-9a89-4e71-84e0-8baa9b883932" providerId="ADAL" clId="{FFAA7A55-6EDE-408F-B9B3-D3DCD33309A1}" dt="2026-07-15T11:48:27.985" v="2" actId="20577"/>
-      <pc:docMkLst>
-        <pc:docMk/>
-      </pc:docMkLst>
-      <pc:sldChg chg="modSp mod">
-        <pc:chgData name="Srilekha Chundu" userId="49a084bb-9a89-4e71-84e0-8baa9b883932" providerId="ADAL" clId="{FFAA7A55-6EDE-408F-B9B3-D3DCD33309A1}" dt="2026-07-15T11:46:54.287" v="1" actId="1076"/>
-        <pc:sldMkLst>
-          <pc:docMk/>
-          <pc:sldMk cId="1205480519" sldId="259"/>
-        </pc:sldMkLst>
-        <pc:spChg chg="mod">
-          <ac:chgData name="Srilekha Chundu" userId="49a084bb-9a89-4e71-84e0-8baa9b883932" providerId="ADAL" clId="{FFAA7A55-6EDE-408F-B9B3-D3DCD33309A1}" dt="2026-07-15T11:46:54.287" v="1" actId="1076"/>
-          <ac:spMkLst>
-            <pc:docMk/>
-            <pc:sldMk cId="1205480519" sldId="259"/>
-            <ac:spMk id="2" creationId="{4DCB68A4-536C-F450-170B-DC621B2938B9}"/>
-          </ac:spMkLst>
-        </pc:spChg>
-      </pc:sldChg>
-      <pc:sldChg chg="modSp mod">
-        <pc:chgData name="Srilekha Chundu" userId="49a084bb-9a89-4e71-84e0-8baa9b883932" providerId="ADAL" clId="{FFAA7A55-6EDE-408F-B9B3-D3DCD33309A1}" dt="2026-07-15T11:48:27.985" v="2" actId="20577"/>
-        <pc:sldMkLst>
-          <pc:docMk/>
-          <pc:sldMk cId="4150747843" sldId="260"/>
-        </pc:sldMkLst>
-        <pc:graphicFrameChg chg="modGraphic">
-          <ac:chgData name="Srilekha Chundu" userId="49a084bb-9a89-4e71-84e0-8baa9b883932" providerId="ADAL" clId="{FFAA7A55-6EDE-408F-B9B3-D3DCD33309A1}" dt="2026-07-15T11:48:27.985" v="2" actId="20577"/>
-          <ac:graphicFrameMkLst>
-            <pc:docMk/>
-            <pc:sldMk cId="4150747843" sldId="260"/>
-            <ac:graphicFrameMk id="3" creationId="{146EFF55-2C9E-7A07-45D7-A2F5B29A58F6}"/>
-          </ac:graphicFrameMkLst>
-        </pc:graphicFrameChg>
-      </pc:sldChg>
-    </pc:docChg>
-  </pc:docChgLst>
-</pc:chgInfo>
 </file>
 
 <file path=ppt/slideLayouts/slideLayout1.xml><?xml version="1.0" encoding="utf-8"?>
@@ -3477,6 +3433,646 @@
           <a:chExt cx="0" cy="0"/>
         </a:xfrm>
       </p:grpSpPr>
+      <p:sp>
+        <p:nvSpPr>
+          <p:cNvPr id="2" name="TextBox 1">
+            <a:extLst>
+              <a:ext uri="{FF2B5EF4-FFF2-40B4-BE49-F238E27FC236}">
+                <a16:creationId xmlns:a16="http://schemas.microsoft.com/office/drawing/2014/main" id="{FC485F08-B6EE-BD33-D643-23EBE266E566}"/>
+              </a:ext>
+            </a:extLst>
+          </p:cNvPr>
+          <p:cNvSpPr txBox="1"/>
+          <p:nvPr/>
+        </p:nvSpPr>
+        <p:spPr>
+          <a:xfrm>
+            <a:off x="757084" y="566311"/>
+            <a:ext cx="10677832" cy="2923877"/>
+          </a:xfrm>
+          <a:prstGeom prst="rect">
+            <a:avLst/>
+          </a:prstGeom>
+          <a:noFill/>
+        </p:spPr>
+        <p:txBody>
+          <a:bodyPr wrap="square" rtlCol="0">
+            <a:spAutoFit/>
+          </a:bodyPr>
+          <a:lstStyle/>
+          <a:p>
+            <a:r>
+              <a:rPr lang="en-US" sz="2000" b="1" dirty="0"/>
+              <a:t>Pandas </a:t>
+            </a:r>
+          </a:p>
+          <a:p>
+            <a:endParaRPr lang="en-US" sz="2000" b="1" dirty="0"/>
+          </a:p>
+          <a:p>
+            <a:r>
+              <a:rPr lang="en-IN" dirty="0"/>
+              <a:t>Pandas is a powerful Python library used for data manipulation, data analysis, and data processing.</a:t>
+            </a:r>
+          </a:p>
+          <a:p>
+            <a:r>
+              <a:rPr lang="en-IN" dirty="0"/>
+              <a:t>Pandas helps developers work with large datasets efficiently by providing easy-to-use data structures and built-in functions.</a:t>
+            </a:r>
+          </a:p>
+          <a:p>
+            <a:r>
+              <a:rPr lang="en-IN" b="1" dirty="0"/>
+              <a:t>Data Manipulation:</a:t>
+            </a:r>
+          </a:p>
+          <a:p>
+            <a:r>
+              <a:rPr lang="en-IN" dirty="0"/>
+              <a:t>Data Manipulation is the process of changing, organizing, and preparing raw data so that it becomes useful for analysis and machine learning.</a:t>
+            </a:r>
+          </a:p>
+          <a:p>
+            <a:r>
+              <a:rPr lang="en-IN" b="1" dirty="0"/>
+              <a:t>Modifying Data</a:t>
+            </a:r>
+          </a:p>
+          <a:p>
+            <a:r>
+              <a:rPr lang="en-IN" dirty="0"/>
+              <a:t>Modifying means changing existing data values.</a:t>
+            </a:r>
+          </a:p>
+        </p:txBody>
+      </p:sp>
+      <p:graphicFrame>
+        <p:nvGraphicFramePr>
+          <p:cNvPr id="3" name="Table 2">
+            <a:extLst>
+              <a:ext uri="{FF2B5EF4-FFF2-40B4-BE49-F238E27FC236}">
+                <a16:creationId xmlns:a16="http://schemas.microsoft.com/office/drawing/2014/main" id="{4955E154-6EEB-1AB8-FD9D-5BA6326B1DB8}"/>
+              </a:ext>
+            </a:extLst>
+          </p:cNvPr>
+          <p:cNvGraphicFramePr>
+            <a:graphicFrameLocks noGrp="1"/>
+          </p:cNvGraphicFramePr>
+          <p:nvPr>
+            <p:extLst>
+              <p:ext uri="{D42A27DB-BD31-4B8C-83A1-F6EECF244321}">
+                <p14:modId xmlns:p14="http://schemas.microsoft.com/office/powerpoint/2010/main" val="3200664242"/>
+              </p:ext>
+            </p:extLst>
+          </p:nvPr>
+        </p:nvGraphicFramePr>
+        <p:xfrm>
+          <a:off x="919316" y="3429000"/>
+          <a:ext cx="10515600" cy="1097280"/>
+        </p:xfrm>
+        <a:graphic>
+          <a:graphicData uri="http://schemas.openxmlformats.org/drawingml/2006/table">
+            <a:tbl>
+              <a:tblPr/>
+              <a:tblGrid>
+                <a:gridCol w="5257800">
+                  <a:extLst>
+                    <a:ext uri="{9D8B030D-6E8A-4147-A177-3AD203B41FA5}">
+                      <a16:colId xmlns:a16="http://schemas.microsoft.com/office/drawing/2014/main" val="2152225094"/>
+                    </a:ext>
+                  </a:extLst>
+                </a:gridCol>
+                <a:gridCol w="5257800">
+                  <a:extLst>
+                    <a:ext uri="{9D8B030D-6E8A-4147-A177-3AD203B41FA5}">
+                      <a16:colId xmlns:a16="http://schemas.microsoft.com/office/drawing/2014/main" val="1878350636"/>
+                    </a:ext>
+                  </a:extLst>
+                </a:gridCol>
+              </a:tblGrid>
+              <a:tr h="0">
+                <a:tc>
+                  <a:txBody>
+                    <a:bodyPr/>
+                    <a:lstStyle/>
+                    <a:p>
+                      <a:pPr>
+                        <a:buNone/>
+                      </a:pPr>
+                      <a:r>
+                        <a:rPr lang="en-IN"/>
+                        <a:t>Name</a:t>
+                      </a:r>
+                    </a:p>
+                  </a:txBody>
+                  <a:tcPr anchor="ctr">
+                    <a:lnL>
+                      <a:noFill/>
+                    </a:lnL>
+                    <a:lnR>
+                      <a:noFill/>
+                    </a:lnR>
+                    <a:lnT>
+                      <a:noFill/>
+                    </a:lnT>
+                    <a:lnB>
+                      <a:noFill/>
+                    </a:lnB>
+                    <a:noFill/>
+                  </a:tcPr>
+                </a:tc>
+                <a:tc>
+                  <a:txBody>
+                    <a:bodyPr/>
+                    <a:lstStyle/>
+                    <a:p>
+                      <a:pPr>
+                        <a:buNone/>
+                      </a:pPr>
+                      <a:r>
+                        <a:rPr lang="en-IN"/>
+                        <a:t>Marks</a:t>
+                      </a:r>
+                    </a:p>
+                  </a:txBody>
+                  <a:tcPr anchor="ctr">
+                    <a:lnL>
+                      <a:noFill/>
+                    </a:lnL>
+                    <a:lnR>
+                      <a:noFill/>
+                    </a:lnR>
+                    <a:lnT>
+                      <a:noFill/>
+                    </a:lnT>
+                    <a:lnB>
+                      <a:noFill/>
+                    </a:lnB>
+                    <a:noFill/>
+                  </a:tcPr>
+                </a:tc>
+                <a:extLst>
+                  <a:ext uri="{0D108BD9-81ED-4DB2-BD59-A6C34878D82A}">
+                    <a16:rowId xmlns:a16="http://schemas.microsoft.com/office/drawing/2014/main" val="1680393764"/>
+                  </a:ext>
+                </a:extLst>
+              </a:tr>
+              <a:tr h="0">
+                <a:tc>
+                  <a:txBody>
+                    <a:bodyPr/>
+                    <a:lstStyle/>
+                    <a:p>
+                      <a:pPr>
+                        <a:buNone/>
+                      </a:pPr>
+                      <a:r>
+                        <a:rPr lang="en-IN" dirty="0"/>
+                        <a:t>Ram</a:t>
+                      </a:r>
+                    </a:p>
+                  </a:txBody>
+                  <a:tcPr anchor="ctr">
+                    <a:lnL>
+                      <a:noFill/>
+                    </a:lnL>
+                    <a:lnR>
+                      <a:noFill/>
+                    </a:lnR>
+                    <a:lnT>
+                      <a:noFill/>
+                    </a:lnT>
+                    <a:lnB>
+                      <a:noFill/>
+                    </a:lnB>
+                    <a:noFill/>
+                  </a:tcPr>
+                </a:tc>
+                <a:tc>
+                  <a:txBody>
+                    <a:bodyPr/>
+                    <a:lstStyle/>
+                    <a:p>
+                      <a:pPr>
+                        <a:buNone/>
+                      </a:pPr>
+                      <a:r>
+                        <a:rPr lang="en-IN"/>
+                        <a:t>85</a:t>
+                      </a:r>
+                    </a:p>
+                  </a:txBody>
+                  <a:tcPr anchor="ctr">
+                    <a:lnL>
+                      <a:noFill/>
+                    </a:lnL>
+                    <a:lnR>
+                      <a:noFill/>
+                    </a:lnR>
+                    <a:lnT>
+                      <a:noFill/>
+                    </a:lnT>
+                    <a:lnB>
+                      <a:noFill/>
+                    </a:lnB>
+                    <a:noFill/>
+                  </a:tcPr>
+                </a:tc>
+                <a:extLst>
+                  <a:ext uri="{0D108BD9-81ED-4DB2-BD59-A6C34878D82A}">
+                    <a16:rowId xmlns:a16="http://schemas.microsoft.com/office/drawing/2014/main" val="1687856148"/>
+                  </a:ext>
+                </a:extLst>
+              </a:tr>
+              <a:tr h="0">
+                <a:tc>
+                  <a:txBody>
+                    <a:bodyPr/>
+                    <a:lstStyle/>
+                    <a:p>
+                      <a:pPr>
+                        <a:buNone/>
+                      </a:pPr>
+                      <a:r>
+                        <a:rPr lang="en-IN"/>
+                        <a:t>Ravi</a:t>
+                      </a:r>
+                    </a:p>
+                  </a:txBody>
+                  <a:tcPr anchor="ctr">
+                    <a:lnL>
+                      <a:noFill/>
+                    </a:lnL>
+                    <a:lnR>
+                      <a:noFill/>
+                    </a:lnR>
+                    <a:lnT>
+                      <a:noFill/>
+                    </a:lnT>
+                    <a:lnB>
+                      <a:noFill/>
+                    </a:lnB>
+                    <a:noFill/>
+                  </a:tcPr>
+                </a:tc>
+                <a:tc>
+                  <a:txBody>
+                    <a:bodyPr/>
+                    <a:lstStyle/>
+                    <a:p>
+                      <a:pPr>
+                        <a:buNone/>
+                      </a:pPr>
+                      <a:r>
+                        <a:rPr lang="en-IN" dirty="0"/>
+                        <a:t>50</a:t>
+                      </a:r>
+                    </a:p>
+                  </a:txBody>
+                  <a:tcPr anchor="ctr">
+                    <a:lnL>
+                      <a:noFill/>
+                    </a:lnL>
+                    <a:lnR>
+                      <a:noFill/>
+                    </a:lnR>
+                    <a:lnT>
+                      <a:noFill/>
+                    </a:lnT>
+                    <a:lnB>
+                      <a:noFill/>
+                    </a:lnB>
+                    <a:noFill/>
+                  </a:tcPr>
+                </a:tc>
+                <a:extLst>
+                  <a:ext uri="{0D108BD9-81ED-4DB2-BD59-A6C34878D82A}">
+                    <a16:rowId xmlns:a16="http://schemas.microsoft.com/office/drawing/2014/main" val="922137735"/>
+                  </a:ext>
+                </a:extLst>
+              </a:tr>
+            </a:tbl>
+          </a:graphicData>
+        </a:graphic>
+      </p:graphicFrame>
+      <p:graphicFrame>
+        <p:nvGraphicFramePr>
+          <p:cNvPr id="5" name="Table 4">
+            <a:extLst>
+              <a:ext uri="{FF2B5EF4-FFF2-40B4-BE49-F238E27FC236}">
+                <a16:creationId xmlns:a16="http://schemas.microsoft.com/office/drawing/2014/main" id="{57051844-5712-3115-C46D-550B075FB4AB}"/>
+              </a:ext>
+            </a:extLst>
+          </p:cNvPr>
+          <p:cNvGraphicFramePr>
+            <a:graphicFrameLocks noGrp="1"/>
+          </p:cNvGraphicFramePr>
+          <p:nvPr>
+            <p:extLst>
+              <p:ext uri="{D42A27DB-BD31-4B8C-83A1-F6EECF244321}">
+                <p14:modId xmlns:p14="http://schemas.microsoft.com/office/powerpoint/2010/main" val="3676279019"/>
+              </p:ext>
+            </p:extLst>
+          </p:nvPr>
+        </p:nvGraphicFramePr>
+        <p:xfrm>
+          <a:off x="838200" y="4849762"/>
+          <a:ext cx="10515600" cy="1097280"/>
+        </p:xfrm>
+        <a:graphic>
+          <a:graphicData uri="http://schemas.openxmlformats.org/drawingml/2006/table">
+            <a:tbl>
+              <a:tblPr/>
+              <a:tblGrid>
+                <a:gridCol w="5257800">
+                  <a:extLst>
+                    <a:ext uri="{9D8B030D-6E8A-4147-A177-3AD203B41FA5}">
+                      <a16:colId xmlns:a16="http://schemas.microsoft.com/office/drawing/2014/main" val="1399905966"/>
+                    </a:ext>
+                  </a:extLst>
+                </a:gridCol>
+                <a:gridCol w="5257800">
+                  <a:extLst>
+                    <a:ext uri="{9D8B030D-6E8A-4147-A177-3AD203B41FA5}">
+                      <a16:colId xmlns:a16="http://schemas.microsoft.com/office/drawing/2014/main" val="92278301"/>
+                    </a:ext>
+                  </a:extLst>
+                </a:gridCol>
+              </a:tblGrid>
+              <a:tr h="0">
+                <a:tc>
+                  <a:txBody>
+                    <a:bodyPr/>
+                    <a:lstStyle/>
+                    <a:p>
+                      <a:pPr>
+                        <a:buNone/>
+                      </a:pPr>
+                      <a:r>
+                        <a:rPr lang="en-IN" dirty="0"/>
+                        <a:t>Name</a:t>
+                      </a:r>
+                    </a:p>
+                  </a:txBody>
+                  <a:tcPr anchor="ctr">
+                    <a:lnL>
+                      <a:noFill/>
+                    </a:lnL>
+                    <a:lnR>
+                      <a:noFill/>
+                    </a:lnR>
+                    <a:lnT>
+                      <a:noFill/>
+                    </a:lnT>
+                    <a:lnB>
+                      <a:noFill/>
+                    </a:lnB>
+                    <a:noFill/>
+                  </a:tcPr>
+                </a:tc>
+                <a:tc>
+                  <a:txBody>
+                    <a:bodyPr/>
+                    <a:lstStyle/>
+                    <a:p>
+                      <a:pPr>
+                        <a:buNone/>
+                      </a:pPr>
+                      <a:r>
+                        <a:rPr lang="en-IN"/>
+                        <a:t>Marks</a:t>
+                      </a:r>
+                    </a:p>
+                  </a:txBody>
+                  <a:tcPr anchor="ctr">
+                    <a:lnL>
+                      <a:noFill/>
+                    </a:lnL>
+                    <a:lnR>
+                      <a:noFill/>
+                    </a:lnR>
+                    <a:lnT>
+                      <a:noFill/>
+                    </a:lnT>
+                    <a:lnB>
+                      <a:noFill/>
+                    </a:lnB>
+                    <a:noFill/>
+                  </a:tcPr>
+                </a:tc>
+                <a:extLst>
+                  <a:ext uri="{0D108BD9-81ED-4DB2-BD59-A6C34878D82A}">
+                    <a16:rowId xmlns:a16="http://schemas.microsoft.com/office/drawing/2014/main" val="1230725020"/>
+                  </a:ext>
+                </a:extLst>
+              </a:tr>
+              <a:tr h="0">
+                <a:tc>
+                  <a:txBody>
+                    <a:bodyPr/>
+                    <a:lstStyle/>
+                    <a:p>
+                      <a:pPr>
+                        <a:buNone/>
+                      </a:pPr>
+                      <a:r>
+                        <a:rPr lang="en-IN"/>
+                        <a:t>Ram</a:t>
+                      </a:r>
+                    </a:p>
+                  </a:txBody>
+                  <a:tcPr anchor="ctr">
+                    <a:lnL>
+                      <a:noFill/>
+                    </a:lnL>
+                    <a:lnR>
+                      <a:noFill/>
+                    </a:lnR>
+                    <a:lnT>
+                      <a:noFill/>
+                    </a:lnT>
+                    <a:lnB>
+                      <a:noFill/>
+                    </a:lnB>
+                    <a:noFill/>
+                  </a:tcPr>
+                </a:tc>
+                <a:tc>
+                  <a:txBody>
+                    <a:bodyPr/>
+                    <a:lstStyle/>
+                    <a:p>
+                      <a:pPr>
+                        <a:buNone/>
+                      </a:pPr>
+                      <a:r>
+                        <a:rPr lang="en-IN"/>
+                        <a:t>85</a:t>
+                      </a:r>
+                    </a:p>
+                  </a:txBody>
+                  <a:tcPr anchor="ctr">
+                    <a:lnL>
+                      <a:noFill/>
+                    </a:lnL>
+                    <a:lnR>
+                      <a:noFill/>
+                    </a:lnR>
+                    <a:lnT>
+                      <a:noFill/>
+                    </a:lnT>
+                    <a:lnB>
+                      <a:noFill/>
+                    </a:lnB>
+                    <a:noFill/>
+                  </a:tcPr>
+                </a:tc>
+                <a:extLst>
+                  <a:ext uri="{0D108BD9-81ED-4DB2-BD59-A6C34878D82A}">
+                    <a16:rowId xmlns:a16="http://schemas.microsoft.com/office/drawing/2014/main" val="3282745520"/>
+                  </a:ext>
+                </a:extLst>
+              </a:tr>
+              <a:tr h="0">
+                <a:tc>
+                  <a:txBody>
+                    <a:bodyPr/>
+                    <a:lstStyle/>
+                    <a:p>
+                      <a:pPr>
+                        <a:buNone/>
+                      </a:pPr>
+                      <a:r>
+                        <a:rPr lang="en-IN" dirty="0"/>
+                        <a:t>Ravi</a:t>
+                      </a:r>
+                    </a:p>
+                  </a:txBody>
+                  <a:tcPr anchor="ctr">
+                    <a:lnL>
+                      <a:noFill/>
+                    </a:lnL>
+                    <a:lnR>
+                      <a:noFill/>
+                    </a:lnR>
+                    <a:lnT>
+                      <a:noFill/>
+                    </a:lnT>
+                    <a:lnB>
+                      <a:noFill/>
+                    </a:lnB>
+                    <a:noFill/>
+                  </a:tcPr>
+                </a:tc>
+                <a:tc>
+                  <a:txBody>
+                    <a:bodyPr/>
+                    <a:lstStyle/>
+                    <a:p>
+                      <a:pPr>
+                        <a:buNone/>
+                      </a:pPr>
+                      <a:r>
+                        <a:rPr lang="en-IN" dirty="0"/>
+                        <a:t>90</a:t>
+                      </a:r>
+                    </a:p>
+                  </a:txBody>
+                  <a:tcPr anchor="ctr">
+                    <a:lnL>
+                      <a:noFill/>
+                    </a:lnL>
+                    <a:lnR>
+                      <a:noFill/>
+                    </a:lnR>
+                    <a:lnT>
+                      <a:noFill/>
+                    </a:lnT>
+                    <a:lnB>
+                      <a:noFill/>
+                    </a:lnB>
+                    <a:noFill/>
+                  </a:tcPr>
+                </a:tc>
+                <a:extLst>
+                  <a:ext uri="{0D108BD9-81ED-4DB2-BD59-A6C34878D82A}">
+                    <a16:rowId xmlns:a16="http://schemas.microsoft.com/office/drawing/2014/main" val="1039348066"/>
+                  </a:ext>
+                </a:extLst>
+              </a:tr>
+            </a:tbl>
+          </a:graphicData>
+        </a:graphic>
+      </p:graphicFrame>
+      <p:sp>
+        <p:nvSpPr>
+          <p:cNvPr id="7" name="TextBox 6">
+            <a:extLst>
+              <a:ext uri="{FF2B5EF4-FFF2-40B4-BE49-F238E27FC236}">
+                <a16:creationId xmlns:a16="http://schemas.microsoft.com/office/drawing/2014/main" id="{A3152AE1-E1B2-0870-7F92-5558AEEBB5A9}"/>
+              </a:ext>
+            </a:extLst>
+          </p:cNvPr>
+          <p:cNvSpPr txBox="1"/>
+          <p:nvPr/>
+        </p:nvSpPr>
+        <p:spPr>
+          <a:xfrm>
+            <a:off x="838200" y="4480430"/>
+            <a:ext cx="6096000" cy="369332"/>
+          </a:xfrm>
+          <a:prstGeom prst="rect">
+            <a:avLst/>
+          </a:prstGeom>
+          <a:noFill/>
+        </p:spPr>
+        <p:txBody>
+          <a:bodyPr wrap="square">
+            <a:spAutoFit/>
+          </a:bodyPr>
+          <a:lstStyle/>
+          <a:p>
+            <a:pPr>
+              <a:buNone/>
+            </a:pPr>
+            <a:r>
+              <a:rPr lang="en-IN" dirty="0"/>
+              <a:t>After modification:</a:t>
+            </a:r>
+          </a:p>
+        </p:txBody>
+      </p:sp>
+    </p:spTree>
+    <p:extLst>
+      <p:ext uri="{BB962C8B-B14F-4D97-AF65-F5344CB8AC3E}">
+        <p14:creationId xmlns:p14="http://schemas.microsoft.com/office/powerpoint/2010/main" val="209417965"/>
+      </p:ext>
+    </p:extLst>
+  </p:cSld>
+  <p:clrMapOvr>
+    <a:masterClrMapping/>
+  </p:clrMapOvr>
+</p:sld>
+</file>
+
+<file path=ppt/slides/slide11.xml><?xml version="1.0" encoding="utf-8"?>
+<p:sld xmlns:a="http://schemas.openxmlformats.org/drawingml/2006/main" xmlns:r="http://schemas.openxmlformats.org/officeDocument/2006/relationships" xmlns:p="http://schemas.openxmlformats.org/presentationml/2006/main">
+  <p:cSld>
+    <p:spTree>
+      <p:nvGrpSpPr>
+        <p:cNvPr id="1" name=""/>
+        <p:cNvGrpSpPr/>
+        <p:nvPr/>
+      </p:nvGrpSpPr>
+      <p:grpSpPr>
+        <a:xfrm>
+          <a:off x="0" y="0"/>
+          <a:ext cx="0" cy="0"/>
+          <a:chOff x="0" y="0"/>
+          <a:chExt cx="0" cy="0"/>
+        </a:xfrm>
+      </p:grpSpPr>
       <p:graphicFrame>
         <p:nvGraphicFramePr>
           <p:cNvPr id="3" name="Table 2">
@@ -4039,7 +4635,7 @@
 </p:sld>
 </file>
 
-<file path=ppt/slides/slide11.xml><?xml version="1.0" encoding="utf-8"?>
+<file path=ppt/slides/slide12.xml><?xml version="1.0" encoding="utf-8"?>
 <p:sld xmlns:a="http://schemas.openxmlformats.org/drawingml/2006/main" xmlns:r="http://schemas.openxmlformats.org/officeDocument/2006/relationships" xmlns:p="http://schemas.openxmlformats.org/presentationml/2006/main">
   <p:cSld>
     <p:spTree>
@@ -4746,7 +5342,7 @@
 </p:sld>
 </file>
 
-<file path=ppt/slides/slide12.xml><?xml version="1.0" encoding="utf-8"?>
+<file path=ppt/slides/slide13.xml><?xml version="1.0" encoding="utf-8"?>
 <p:sld xmlns:a="http://schemas.openxmlformats.org/drawingml/2006/main" xmlns:r="http://schemas.openxmlformats.org/officeDocument/2006/relationships" xmlns:p="http://schemas.openxmlformats.org/presentationml/2006/main">
   <p:cSld>
     <p:spTree>
@@ -4949,7 +5545,7 @@
 </p:sld>
 </file>
 
-<file path=ppt/slides/slide13.xml><?xml version="1.0" encoding="utf-8"?>
+<file path=ppt/slides/slide14.xml><?xml version="1.0" encoding="utf-8"?>
 <p:sld xmlns:a="http://schemas.openxmlformats.org/drawingml/2006/main" xmlns:r="http://schemas.openxmlformats.org/officeDocument/2006/relationships" xmlns:p="http://schemas.openxmlformats.org/presentationml/2006/main">
   <p:cSld>
     <p:spTree>
@@ -5179,7 +5775,7 @@
 </p:sld>
 </file>
 
-<file path=ppt/slides/slide14.xml><?xml version="1.0" encoding="utf-8"?>
+<file path=ppt/slides/slide15.xml><?xml version="1.0" encoding="utf-8"?>
 <p:sld xmlns:a="http://schemas.openxmlformats.org/drawingml/2006/main" xmlns:r="http://schemas.openxmlformats.org/officeDocument/2006/relationships" xmlns:p="http://schemas.openxmlformats.org/presentationml/2006/main">
   <p:cSld>
     <p:spTree>
@@ -5472,7 +6068,7 @@
 </p:sld>
 </file>
 
-<file path=ppt/slides/slide15.xml><?xml version="1.0" encoding="utf-8"?>
+<file path=ppt/slides/slide16.xml><?xml version="1.0" encoding="utf-8"?>
 <p:sld xmlns:a="http://schemas.openxmlformats.org/drawingml/2006/main" xmlns:r="http://schemas.openxmlformats.org/officeDocument/2006/relationships" xmlns:p="http://schemas.openxmlformats.org/presentationml/2006/main">
   <p:cSld>
     <p:spTree>
@@ -5644,7 +6240,7 @@
 </p:sld>
 </file>
 
-<file path=ppt/slides/slide16.xml><?xml version="1.0" encoding="utf-8"?>
+<file path=ppt/slides/slide17.xml><?xml version="1.0" encoding="utf-8"?>
 <p:sld xmlns:a="http://schemas.openxmlformats.org/drawingml/2006/main" xmlns:r="http://schemas.openxmlformats.org/officeDocument/2006/relationships" xmlns:p="http://schemas.openxmlformats.org/presentationml/2006/main">
   <p:cSld>
     <p:spTree>
@@ -5958,7 +6554,7 @@
 </p:sld>
 </file>
 
-<file path=ppt/slides/slide17.xml><?xml version="1.0" encoding="utf-8"?>
+<file path=ppt/slides/slide18.xml><?xml version="1.0" encoding="utf-8"?>
 <p:sld xmlns:a="http://schemas.openxmlformats.org/drawingml/2006/main" xmlns:r="http://schemas.openxmlformats.org/officeDocument/2006/relationships" xmlns:p="http://schemas.openxmlformats.org/presentationml/2006/main">
   <p:cSld>
     <p:spTree>
@@ -6132,7 +6728,7 @@
 </p:sld>
 </file>
 
-<file path=ppt/slides/slide18.xml><?xml version="1.0" encoding="utf-8"?>
+<file path=ppt/slides/slide19.xml><?xml version="1.0" encoding="utf-8"?>
 <p:sld xmlns:a="http://schemas.openxmlformats.org/drawingml/2006/main" xmlns:r="http://schemas.openxmlformats.org/officeDocument/2006/relationships" xmlns:p="http://schemas.openxmlformats.org/presentationml/2006/main">
   <p:cSld>
     <p:spTree>
@@ -6284,256 +6880,6 @@
     <p:extLst>
       <p:ext uri="{BB962C8B-B14F-4D97-AF65-F5344CB8AC3E}">
         <p14:creationId xmlns:p14="http://schemas.microsoft.com/office/powerpoint/2010/main" val="2607546937"/>
-      </p:ext>
-    </p:extLst>
-  </p:cSld>
-  <p:clrMapOvr>
-    <a:masterClrMapping/>
-  </p:clrMapOvr>
-</p:sld>
-</file>
-
-<file path=ppt/slides/slide19.xml><?xml version="1.0" encoding="utf-8"?>
-<p:sld xmlns:a="http://schemas.openxmlformats.org/drawingml/2006/main" xmlns:r="http://schemas.openxmlformats.org/officeDocument/2006/relationships" xmlns:p="http://schemas.openxmlformats.org/presentationml/2006/main">
-  <p:cSld>
-    <p:spTree>
-      <p:nvGrpSpPr>
-        <p:cNvPr id="1" name=""/>
-        <p:cNvGrpSpPr/>
-        <p:nvPr/>
-      </p:nvGrpSpPr>
-      <p:grpSpPr>
-        <a:xfrm>
-          <a:off x="0" y="0"/>
-          <a:ext cx="0" cy="0"/>
-          <a:chOff x="0" y="0"/>
-          <a:chExt cx="0" cy="0"/>
-        </a:xfrm>
-      </p:grpSpPr>
-      <p:sp>
-        <p:nvSpPr>
-          <p:cNvPr id="2" name="TextBox 1">
-            <a:extLst>
-              <a:ext uri="{FF2B5EF4-FFF2-40B4-BE49-F238E27FC236}">
-                <a16:creationId xmlns:a16="http://schemas.microsoft.com/office/drawing/2014/main" id="{5B90A389-4CD3-533D-F999-605225A66048}"/>
-              </a:ext>
-            </a:extLst>
-          </p:cNvPr>
-          <p:cNvSpPr txBox="1"/>
-          <p:nvPr/>
-        </p:nvSpPr>
-        <p:spPr>
-          <a:xfrm>
-            <a:off x="560614" y="522515"/>
-            <a:ext cx="11070771" cy="6186309"/>
-          </a:xfrm>
-          <a:prstGeom prst="rect">
-            <a:avLst/>
-          </a:prstGeom>
-          <a:noFill/>
-        </p:spPr>
-        <p:txBody>
-          <a:bodyPr wrap="square" rtlCol="0">
-            <a:spAutoFit/>
-          </a:bodyPr>
-          <a:lstStyle/>
-          <a:p>
-            <a:r>
-              <a:rPr lang="en-IN" b="1" dirty="0" err="1"/>
-              <a:t>PyTorch</a:t>
-            </a:r>
-            <a:endParaRPr lang="en-IN" b="1" dirty="0"/>
-          </a:p>
-          <a:p>
-            <a:endParaRPr lang="en-IN" b="1" dirty="0"/>
-          </a:p>
-          <a:p>
-            <a:r>
-              <a:rPr lang="en-IN" b="1" dirty="0" err="1"/>
-              <a:t>PyTorch</a:t>
-            </a:r>
-            <a:r>
-              <a:rPr lang="en-IN" dirty="0"/>
-              <a:t> is an open-source Deep Learning framework developed by </a:t>
-            </a:r>
-            <a:r>
-              <a:rPr lang="en-IN" b="1" dirty="0"/>
-              <a:t>Meta</a:t>
-            </a:r>
-          </a:p>
-          <a:p>
-            <a:endParaRPr lang="en-IN" b="1" dirty="0"/>
-          </a:p>
-          <a:p>
-            <a:r>
-              <a:rPr lang="en-IN" b="1" dirty="0"/>
-              <a:t>Applications:</a:t>
-            </a:r>
-            <a:endParaRPr lang="en-IN" dirty="0"/>
-          </a:p>
-          <a:p>
-            <a:r>
-              <a:rPr lang="en-IN" dirty="0"/>
-              <a:t>Computer vision: Teaching computers to understand images and videos.</a:t>
-            </a:r>
-          </a:p>
-          <a:p>
-            <a:r>
-              <a:rPr lang="en-IN" dirty="0"/>
-              <a:t>Natural Language Processing(NLP): Allows computers to understand human language.</a:t>
-            </a:r>
-          </a:p>
-          <a:p>
-            <a:r>
-              <a:rPr lang="en-IN" dirty="0"/>
-              <a:t>EX:</a:t>
-            </a:r>
-          </a:p>
-          <a:p>
-            <a:r>
-              <a:rPr lang="en-US" dirty="0"/>
-              <a:t>import torch</a:t>
-            </a:r>
-          </a:p>
-          <a:p>
-            <a:r>
-              <a:rPr lang="en-US" dirty="0"/>
-              <a:t>a = </a:t>
-            </a:r>
-            <a:r>
-              <a:rPr lang="en-US" dirty="0" err="1"/>
-              <a:t>torch.tensor</a:t>
-            </a:r>
-            <a:r>
-              <a:rPr lang="en-US" dirty="0"/>
-              <a:t>([1, 2, 3])</a:t>
-            </a:r>
-          </a:p>
-          <a:p>
-            <a:r>
-              <a:rPr lang="en-US" dirty="0"/>
-              <a:t>b = </a:t>
-            </a:r>
-            <a:r>
-              <a:rPr lang="en-US" dirty="0" err="1"/>
-              <a:t>torch.tensor</a:t>
-            </a:r>
-            <a:r>
-              <a:rPr lang="en-US" dirty="0"/>
-              <a:t>([4, 5, 6])</a:t>
-            </a:r>
-          </a:p>
-          <a:p>
-            <a:r>
-              <a:rPr lang="en-US" dirty="0"/>
-              <a:t>print(a + b)</a:t>
-            </a:r>
-          </a:p>
-          <a:p>
-            <a:endParaRPr lang="en-US" dirty="0"/>
-          </a:p>
-          <a:p>
-            <a:r>
-              <a:rPr lang="en-IN" dirty="0"/>
-              <a:t>import torch</a:t>
-            </a:r>
-          </a:p>
-          <a:p>
-            <a:r>
-              <a:rPr lang="en-IN" dirty="0"/>
-              <a:t>import </a:t>
-            </a:r>
-            <a:r>
-              <a:rPr lang="en-IN" dirty="0" err="1"/>
-              <a:t>torch.nn</a:t>
-            </a:r>
-            <a:r>
-              <a:rPr lang="en-IN" dirty="0"/>
-              <a:t> as </a:t>
-            </a:r>
-            <a:r>
-              <a:rPr lang="en-IN" dirty="0" err="1"/>
-              <a:t>nn</a:t>
-            </a:r>
-            <a:endParaRPr lang="en-IN" dirty="0"/>
-          </a:p>
-          <a:p>
-            <a:r>
-              <a:rPr lang="en-IN" dirty="0"/>
-              <a:t>model = </a:t>
-            </a:r>
-            <a:r>
-              <a:rPr lang="en-IN" dirty="0" err="1"/>
-              <a:t>nn.Sequential</a:t>
-            </a:r>
-            <a:r>
-              <a:rPr lang="en-IN" dirty="0"/>
-              <a:t>(</a:t>
-            </a:r>
-          </a:p>
-          <a:p>
-            <a:r>
-              <a:rPr lang="en-IN" dirty="0"/>
-              <a:t>    </a:t>
-            </a:r>
-            <a:r>
-              <a:rPr lang="en-IN" dirty="0" err="1"/>
-              <a:t>nn.Linear</a:t>
-            </a:r>
-            <a:r>
-              <a:rPr lang="en-IN" dirty="0"/>
-              <a:t>(1, 10),</a:t>
-            </a:r>
-          </a:p>
-          <a:p>
-            <a:r>
-              <a:rPr lang="en-IN" dirty="0"/>
-              <a:t>    </a:t>
-            </a:r>
-            <a:r>
-              <a:rPr lang="en-IN" dirty="0" err="1"/>
-              <a:t>nn.ReLU</a:t>
-            </a:r>
-            <a:r>
-              <a:rPr lang="en-IN" dirty="0"/>
-              <a:t>(),</a:t>
-            </a:r>
-          </a:p>
-          <a:p>
-            <a:r>
-              <a:rPr lang="en-IN" dirty="0"/>
-              <a:t>    </a:t>
-            </a:r>
-            <a:r>
-              <a:rPr lang="en-IN" dirty="0" err="1"/>
-              <a:t>nn.Linear</a:t>
-            </a:r>
-            <a:r>
-              <a:rPr lang="en-IN" dirty="0"/>
-              <a:t>(10, 1)</a:t>
-            </a:r>
-          </a:p>
-          <a:p>
-            <a:r>
-              <a:rPr lang="en-IN" dirty="0"/>
-              <a:t>)</a:t>
-            </a:r>
-          </a:p>
-          <a:p>
-            <a:r>
-              <a:rPr lang="en-IN" dirty="0"/>
-              <a:t>print(model)</a:t>
-            </a:r>
-          </a:p>
-          <a:p>
-            <a:endParaRPr lang="en-IN" dirty="0"/>
-          </a:p>
-        </p:txBody>
-      </p:sp>
-    </p:spTree>
-    <p:extLst>
-      <p:ext uri="{BB962C8B-B14F-4D97-AF65-F5344CB8AC3E}">
-        <p14:creationId xmlns:p14="http://schemas.microsoft.com/office/powerpoint/2010/main" val="3265537322"/>
       </p:ext>
     </p:extLst>
   </p:cSld>
@@ -6822,6 +7168,256 @@
           <p:cNvPr id="2" name="TextBox 1">
             <a:extLst>
               <a:ext uri="{FF2B5EF4-FFF2-40B4-BE49-F238E27FC236}">
+                <a16:creationId xmlns:a16="http://schemas.microsoft.com/office/drawing/2014/main" id="{5B90A389-4CD3-533D-F999-605225A66048}"/>
+              </a:ext>
+            </a:extLst>
+          </p:cNvPr>
+          <p:cNvSpPr txBox="1"/>
+          <p:nvPr/>
+        </p:nvSpPr>
+        <p:spPr>
+          <a:xfrm>
+            <a:off x="560614" y="522515"/>
+            <a:ext cx="11070771" cy="6186309"/>
+          </a:xfrm>
+          <a:prstGeom prst="rect">
+            <a:avLst/>
+          </a:prstGeom>
+          <a:noFill/>
+        </p:spPr>
+        <p:txBody>
+          <a:bodyPr wrap="square" rtlCol="0">
+            <a:spAutoFit/>
+          </a:bodyPr>
+          <a:lstStyle/>
+          <a:p>
+            <a:r>
+              <a:rPr lang="en-IN" b="1" dirty="0" err="1"/>
+              <a:t>PyTorch</a:t>
+            </a:r>
+            <a:endParaRPr lang="en-IN" b="1" dirty="0"/>
+          </a:p>
+          <a:p>
+            <a:endParaRPr lang="en-IN" b="1" dirty="0"/>
+          </a:p>
+          <a:p>
+            <a:r>
+              <a:rPr lang="en-IN" b="1" dirty="0" err="1"/>
+              <a:t>PyTorch</a:t>
+            </a:r>
+            <a:r>
+              <a:rPr lang="en-IN" dirty="0"/>
+              <a:t> is an open-source Deep Learning framework developed by </a:t>
+            </a:r>
+            <a:r>
+              <a:rPr lang="en-IN" b="1" dirty="0"/>
+              <a:t>Meta</a:t>
+            </a:r>
+          </a:p>
+          <a:p>
+            <a:endParaRPr lang="en-IN" b="1" dirty="0"/>
+          </a:p>
+          <a:p>
+            <a:r>
+              <a:rPr lang="en-IN" b="1" dirty="0"/>
+              <a:t>Applications:</a:t>
+            </a:r>
+            <a:endParaRPr lang="en-IN" dirty="0"/>
+          </a:p>
+          <a:p>
+            <a:r>
+              <a:rPr lang="en-IN" dirty="0"/>
+              <a:t>Computer vision: Teaching computers to understand images and videos.</a:t>
+            </a:r>
+          </a:p>
+          <a:p>
+            <a:r>
+              <a:rPr lang="en-IN" dirty="0"/>
+              <a:t>Natural Language Processing(NLP): Allows computers to understand human language.</a:t>
+            </a:r>
+          </a:p>
+          <a:p>
+            <a:r>
+              <a:rPr lang="en-IN" dirty="0"/>
+              <a:t>EX:</a:t>
+            </a:r>
+          </a:p>
+          <a:p>
+            <a:r>
+              <a:rPr lang="en-US" dirty="0"/>
+              <a:t>import torch</a:t>
+            </a:r>
+          </a:p>
+          <a:p>
+            <a:r>
+              <a:rPr lang="en-US" dirty="0"/>
+              <a:t>a = </a:t>
+            </a:r>
+            <a:r>
+              <a:rPr lang="en-US" dirty="0" err="1"/>
+              <a:t>torch.tensor</a:t>
+            </a:r>
+            <a:r>
+              <a:rPr lang="en-US" dirty="0"/>
+              <a:t>([1, 2, 3])</a:t>
+            </a:r>
+          </a:p>
+          <a:p>
+            <a:r>
+              <a:rPr lang="en-US" dirty="0"/>
+              <a:t>b = </a:t>
+            </a:r>
+            <a:r>
+              <a:rPr lang="en-US" dirty="0" err="1"/>
+              <a:t>torch.tensor</a:t>
+            </a:r>
+            <a:r>
+              <a:rPr lang="en-US" dirty="0"/>
+              <a:t>([4, 5, 6])</a:t>
+            </a:r>
+          </a:p>
+          <a:p>
+            <a:r>
+              <a:rPr lang="en-US" dirty="0"/>
+              <a:t>print(a + b)</a:t>
+            </a:r>
+          </a:p>
+          <a:p>
+            <a:endParaRPr lang="en-US" dirty="0"/>
+          </a:p>
+          <a:p>
+            <a:r>
+              <a:rPr lang="en-IN" dirty="0"/>
+              <a:t>import torch</a:t>
+            </a:r>
+          </a:p>
+          <a:p>
+            <a:r>
+              <a:rPr lang="en-IN" dirty="0"/>
+              <a:t>import </a:t>
+            </a:r>
+            <a:r>
+              <a:rPr lang="en-IN" dirty="0" err="1"/>
+              <a:t>torch.nn</a:t>
+            </a:r>
+            <a:r>
+              <a:rPr lang="en-IN" dirty="0"/>
+              <a:t> as </a:t>
+            </a:r>
+            <a:r>
+              <a:rPr lang="en-IN" dirty="0" err="1"/>
+              <a:t>nn</a:t>
+            </a:r>
+            <a:endParaRPr lang="en-IN" dirty="0"/>
+          </a:p>
+          <a:p>
+            <a:r>
+              <a:rPr lang="en-IN" dirty="0"/>
+              <a:t>model = </a:t>
+            </a:r>
+            <a:r>
+              <a:rPr lang="en-IN" dirty="0" err="1"/>
+              <a:t>nn.Sequential</a:t>
+            </a:r>
+            <a:r>
+              <a:rPr lang="en-IN" dirty="0"/>
+              <a:t>(</a:t>
+            </a:r>
+          </a:p>
+          <a:p>
+            <a:r>
+              <a:rPr lang="en-IN" dirty="0"/>
+              <a:t>    </a:t>
+            </a:r>
+            <a:r>
+              <a:rPr lang="en-IN" dirty="0" err="1"/>
+              <a:t>nn.Linear</a:t>
+            </a:r>
+            <a:r>
+              <a:rPr lang="en-IN" dirty="0"/>
+              <a:t>(1, 10),</a:t>
+            </a:r>
+          </a:p>
+          <a:p>
+            <a:r>
+              <a:rPr lang="en-IN" dirty="0"/>
+              <a:t>    </a:t>
+            </a:r>
+            <a:r>
+              <a:rPr lang="en-IN" dirty="0" err="1"/>
+              <a:t>nn.ReLU</a:t>
+            </a:r>
+            <a:r>
+              <a:rPr lang="en-IN" dirty="0"/>
+              <a:t>(),</a:t>
+            </a:r>
+          </a:p>
+          <a:p>
+            <a:r>
+              <a:rPr lang="en-IN" dirty="0"/>
+              <a:t>    </a:t>
+            </a:r>
+            <a:r>
+              <a:rPr lang="en-IN" dirty="0" err="1"/>
+              <a:t>nn.Linear</a:t>
+            </a:r>
+            <a:r>
+              <a:rPr lang="en-IN" dirty="0"/>
+              <a:t>(10, 1)</a:t>
+            </a:r>
+          </a:p>
+          <a:p>
+            <a:r>
+              <a:rPr lang="en-IN" dirty="0"/>
+              <a:t>)</a:t>
+            </a:r>
+          </a:p>
+          <a:p>
+            <a:r>
+              <a:rPr lang="en-IN" dirty="0"/>
+              <a:t>print(model)</a:t>
+            </a:r>
+          </a:p>
+          <a:p>
+            <a:endParaRPr lang="en-IN" dirty="0"/>
+          </a:p>
+        </p:txBody>
+      </p:sp>
+    </p:spTree>
+    <p:extLst>
+      <p:ext uri="{BB962C8B-B14F-4D97-AF65-F5344CB8AC3E}">
+        <p14:creationId xmlns:p14="http://schemas.microsoft.com/office/powerpoint/2010/main" val="3265537322"/>
+      </p:ext>
+    </p:extLst>
+  </p:cSld>
+  <p:clrMapOvr>
+    <a:masterClrMapping/>
+  </p:clrMapOvr>
+</p:sld>
+</file>
+
+<file path=ppt/slides/slide21.xml><?xml version="1.0" encoding="utf-8"?>
+<p:sld xmlns:a="http://schemas.openxmlformats.org/drawingml/2006/main" xmlns:r="http://schemas.openxmlformats.org/officeDocument/2006/relationships" xmlns:p="http://schemas.openxmlformats.org/presentationml/2006/main">
+  <p:cSld>
+    <p:spTree>
+      <p:nvGrpSpPr>
+        <p:cNvPr id="1" name=""/>
+        <p:cNvGrpSpPr/>
+        <p:nvPr/>
+      </p:nvGrpSpPr>
+      <p:grpSpPr>
+        <a:xfrm>
+          <a:off x="0" y="0"/>
+          <a:ext cx="0" cy="0"/>
+          <a:chOff x="0" y="0"/>
+          <a:chExt cx="0" cy="0"/>
+        </a:xfrm>
+      </p:grpSpPr>
+      <p:sp>
+        <p:nvSpPr>
+          <p:cNvPr id="2" name="TextBox 1">
+            <a:extLst>
+              <a:ext uri="{FF2B5EF4-FFF2-40B4-BE49-F238E27FC236}">
                 <a16:creationId xmlns:a16="http://schemas.microsoft.com/office/drawing/2014/main" id="{686A41B2-8BF2-2CF2-39A4-20695ACEAA85}"/>
               </a:ext>
             </a:extLst>
@@ -6955,7 +7551,7 @@
 </p:sld>
 </file>
 
-<file path=ppt/slides/slide21.xml><?xml version="1.0" encoding="utf-8"?>
+<file path=ppt/slides/slide22.xml><?xml version="1.0" encoding="utf-8"?>
 <p:sld xmlns:a="http://schemas.openxmlformats.org/drawingml/2006/main" xmlns:r="http://schemas.openxmlformats.org/officeDocument/2006/relationships" xmlns:p="http://schemas.openxmlformats.org/presentationml/2006/main">
   <p:cSld>
     <p:spTree>
@@ -7096,7 +7692,7 @@
 </p:sld>
 </file>
 
-<file path=ppt/slides/slide22.xml><?xml version="1.0" encoding="utf-8"?>
+<file path=ppt/slides/slide23.xml><?xml version="1.0" encoding="utf-8"?>
 <p:sld xmlns:a="http://schemas.openxmlformats.org/drawingml/2006/main" xmlns:r="http://schemas.openxmlformats.org/officeDocument/2006/relationships" xmlns:p="http://schemas.openxmlformats.org/presentationml/2006/main">
   <p:cSld>
     <p:spTree>
@@ -7265,7 +7861,7 @@
 </p:sld>
 </file>
 
-<file path=ppt/slides/slide23.xml><?xml version="1.0" encoding="utf-8"?>
+<file path=ppt/slides/slide24.xml><?xml version="1.0" encoding="utf-8"?>
 <p:sld xmlns:a="http://schemas.openxmlformats.org/drawingml/2006/main" xmlns:r="http://schemas.openxmlformats.org/officeDocument/2006/relationships" xmlns:p="http://schemas.openxmlformats.org/presentationml/2006/main">
   <p:cSld>
     <p:spTree>
@@ -7495,36 +8091,6 @@
     <p:extLst>
       <p:ext uri="{BB962C8B-B14F-4D97-AF65-F5344CB8AC3E}">
         <p14:creationId xmlns:p14="http://schemas.microsoft.com/office/powerpoint/2010/main" val="1152197564"/>
-      </p:ext>
-    </p:extLst>
-  </p:cSld>
-  <p:clrMapOvr>
-    <a:masterClrMapping/>
-  </p:clrMapOvr>
-</p:sld>
-</file>
-
-<file path=ppt/slides/slide24.xml><?xml version="1.0" encoding="utf-8"?>
-<p:sld xmlns:a="http://schemas.openxmlformats.org/drawingml/2006/main" xmlns:r="http://schemas.openxmlformats.org/officeDocument/2006/relationships" xmlns:p="http://schemas.openxmlformats.org/presentationml/2006/main">
-  <p:cSld>
-    <p:spTree>
-      <p:nvGrpSpPr>
-        <p:cNvPr id="1" name=""/>
-        <p:cNvGrpSpPr/>
-        <p:nvPr/>
-      </p:nvGrpSpPr>
-      <p:grpSpPr>
-        <a:xfrm>
-          <a:off x="0" y="0"/>
-          <a:ext cx="0" cy="0"/>
-          <a:chOff x="0" y="0"/>
-          <a:chExt cx="0" cy="0"/>
-        </a:xfrm>
-      </p:grpSpPr>
-    </p:spTree>
-    <p:extLst>
-      <p:ext uri="{BB962C8B-B14F-4D97-AF65-F5344CB8AC3E}">
-        <p14:creationId xmlns:p14="http://schemas.microsoft.com/office/powerpoint/2010/main" val="765647780"/>
       </p:ext>
     </p:extLst>
   </p:cSld>
@@ -7883,7 +8449,7 @@
           </a:p>
           <a:p>
             <a:r>
-              <a:rPr lang="en-IN" dirty="0"/>
+              <a:rPr lang="en-IN" b="1" dirty="0"/>
               <a:t>Examples:</a:t>
             </a:r>
           </a:p>
@@ -8665,6 +9231,226 @@
           <p:cNvPr id="2" name="TextBox 1">
             <a:extLst>
               <a:ext uri="{FF2B5EF4-FFF2-40B4-BE49-F238E27FC236}">
+                <a16:creationId xmlns:a16="http://schemas.microsoft.com/office/drawing/2014/main" id="{94505364-1782-6EC1-3466-592469ED37BC}"/>
+              </a:ext>
+            </a:extLst>
+          </p:cNvPr>
+          <p:cNvSpPr txBox="1"/>
+          <p:nvPr/>
+        </p:nvSpPr>
+        <p:spPr>
+          <a:xfrm>
+            <a:off x="447367" y="380999"/>
+            <a:ext cx="11297265" cy="6177140"/>
+          </a:xfrm>
+          <a:prstGeom prst="rect">
+            <a:avLst/>
+          </a:prstGeom>
+          <a:noFill/>
+        </p:spPr>
+        <p:txBody>
+          <a:bodyPr wrap="square" rtlCol="0">
+            <a:spAutoFit/>
+          </a:bodyPr>
+          <a:lstStyle/>
+          <a:p>
+            <a:r>
+              <a:rPr lang="en-IN" sz="2000" b="1" dirty="0"/>
+              <a:t>                                                                    What are the benefits of libraries?</a:t>
+            </a:r>
+          </a:p>
+          <a:p>
+            <a:pPr>
+              <a:lnSpc>
+                <a:spcPct val="150000"/>
+              </a:lnSpc>
+            </a:pPr>
+            <a:r>
+              <a:rPr lang="en-IN" b="1" dirty="0"/>
+              <a:t>Faster Development:</a:t>
+            </a:r>
+          </a:p>
+          <a:p>
+            <a:pPr>
+              <a:lnSpc>
+                <a:spcPct val="150000"/>
+              </a:lnSpc>
+            </a:pPr>
+            <a:r>
+              <a:rPr lang="en-IN" dirty="0"/>
+              <a:t>Libraries provide ready-made functions that perform tasks instantly.</a:t>
+            </a:r>
+          </a:p>
+          <a:p>
+            <a:pPr>
+              <a:lnSpc>
+                <a:spcPct val="150000"/>
+              </a:lnSpc>
+            </a:pPr>
+            <a:r>
+              <a:rPr lang="en-IN" dirty="0"/>
+              <a:t>Developers don't need to write lengthy code.</a:t>
+            </a:r>
+          </a:p>
+          <a:p>
+            <a:pPr>
+              <a:lnSpc>
+                <a:spcPct val="150000"/>
+              </a:lnSpc>
+            </a:pPr>
+            <a:r>
+              <a:rPr lang="en-IN" b="1" dirty="0"/>
+              <a:t>Reduces Complexity:</a:t>
+            </a:r>
+          </a:p>
+          <a:p>
+            <a:pPr>
+              <a:lnSpc>
+                <a:spcPct val="150000"/>
+              </a:lnSpc>
+            </a:pPr>
+            <a:r>
+              <a:rPr lang="en-IN" dirty="0"/>
+              <a:t>AI involves complicated mathematical operations.</a:t>
+            </a:r>
+          </a:p>
+          <a:p>
+            <a:pPr>
+              <a:lnSpc>
+                <a:spcPct val="150000"/>
+              </a:lnSpc>
+            </a:pPr>
+            <a:r>
+              <a:rPr lang="en-IN" dirty="0"/>
+              <a:t>Libraries simplify these operations.</a:t>
+            </a:r>
+          </a:p>
+          <a:p>
+            <a:pPr>
+              <a:lnSpc>
+                <a:spcPct val="150000"/>
+              </a:lnSpc>
+            </a:pPr>
+            <a:r>
+              <a:rPr lang="en-IN" b="1" dirty="0"/>
+              <a:t>Code Reusability:</a:t>
+            </a:r>
+          </a:p>
+          <a:p>
+            <a:pPr>
+              <a:lnSpc>
+                <a:spcPct val="150000"/>
+              </a:lnSpc>
+            </a:pPr>
+            <a:r>
+              <a:rPr lang="en-IN" dirty="0"/>
+              <a:t>Libraries allow developers to reuse existing code.</a:t>
+            </a:r>
+          </a:p>
+          <a:p>
+            <a:pPr>
+              <a:lnSpc>
+                <a:spcPct val="150000"/>
+              </a:lnSpc>
+            </a:pPr>
+            <a:r>
+              <a:rPr lang="en-IN" b="1" dirty="0"/>
+              <a:t>Easy Learning:</a:t>
+            </a:r>
+          </a:p>
+          <a:p>
+            <a:pPr>
+              <a:lnSpc>
+                <a:spcPct val="150000"/>
+              </a:lnSpc>
+            </a:pPr>
+            <a:r>
+              <a:rPr lang="en-IN" dirty="0"/>
+              <a:t>Libraries provide simple and beginner-friendly syntax.</a:t>
+            </a:r>
+          </a:p>
+          <a:p>
+            <a:pPr>
+              <a:lnSpc>
+                <a:spcPct val="150000"/>
+              </a:lnSpc>
+            </a:pPr>
+            <a:r>
+              <a:rPr lang="en-IN" b="1" dirty="0"/>
+              <a:t>Scalability:</a:t>
+            </a:r>
+          </a:p>
+          <a:p>
+            <a:pPr>
+              <a:lnSpc>
+                <a:spcPct val="150000"/>
+              </a:lnSpc>
+            </a:pPr>
+            <a:r>
+              <a:rPr lang="en-IN" dirty="0"/>
+              <a:t>Libraries can handle both small and large projects.</a:t>
+            </a:r>
+          </a:p>
+          <a:p>
+            <a:pPr>
+              <a:lnSpc>
+                <a:spcPct val="150000"/>
+              </a:lnSpc>
+            </a:pPr>
+            <a:r>
+              <a:rPr lang="en-IN" b="1" dirty="0"/>
+              <a:t>Access to Advanced Technologies</a:t>
+            </a:r>
+          </a:p>
+          <a:p>
+            <a:pPr>
+              <a:lnSpc>
+                <a:spcPct val="150000"/>
+              </a:lnSpc>
+            </a:pPr>
+            <a:r>
+              <a:rPr lang="en-IN" dirty="0"/>
+              <a:t>Libraries provide access to advanced AI techniques.</a:t>
+            </a:r>
+            <a:endParaRPr lang="en-IN" b="1" dirty="0"/>
+          </a:p>
+        </p:txBody>
+      </p:sp>
+    </p:spTree>
+    <p:extLst>
+      <p:ext uri="{BB962C8B-B14F-4D97-AF65-F5344CB8AC3E}">
+        <p14:creationId xmlns:p14="http://schemas.microsoft.com/office/powerpoint/2010/main" val="644165397"/>
+      </p:ext>
+    </p:extLst>
+  </p:cSld>
+  <p:clrMapOvr>
+    <a:masterClrMapping/>
+  </p:clrMapOvr>
+</p:sld>
+</file>
+
+<file path=ppt/slides/slide8.xml><?xml version="1.0" encoding="utf-8"?>
+<p:sld xmlns:a="http://schemas.openxmlformats.org/drawingml/2006/main" xmlns:r="http://schemas.openxmlformats.org/officeDocument/2006/relationships" xmlns:p="http://schemas.openxmlformats.org/presentationml/2006/main">
+  <p:cSld>
+    <p:spTree>
+      <p:nvGrpSpPr>
+        <p:cNvPr id="1" name=""/>
+        <p:cNvGrpSpPr/>
+        <p:nvPr/>
+      </p:nvGrpSpPr>
+      <p:grpSpPr>
+        <a:xfrm>
+          <a:off x="0" y="0"/>
+          <a:ext cx="0" cy="0"/>
+          <a:chOff x="0" y="0"/>
+          <a:chExt cx="0" cy="0"/>
+        </a:xfrm>
+      </p:grpSpPr>
+      <p:sp>
+        <p:nvSpPr>
+          <p:cNvPr id="2" name="TextBox 1">
+            <a:extLst>
+              <a:ext uri="{FF2B5EF4-FFF2-40B4-BE49-F238E27FC236}">
                 <a16:creationId xmlns:a16="http://schemas.microsoft.com/office/drawing/2014/main" id="{4996C6E7-6A54-4037-FE9E-99DB34987532}"/>
               </a:ext>
             </a:extLst>
@@ -8825,7 +9611,7 @@
 </p:sld>
 </file>
 
-<file path=ppt/slides/slide8.xml><?xml version="1.0" encoding="utf-8"?>
+<file path=ppt/slides/slide9.xml><?xml version="1.0" encoding="utf-8"?>
 <p:sld xmlns:a="http://schemas.openxmlformats.org/drawingml/2006/main" xmlns:r="http://schemas.openxmlformats.org/officeDocument/2006/relationships" xmlns:p="http://schemas.openxmlformats.org/presentationml/2006/main">
   <p:cSld>
     <p:spTree>
@@ -9717,646 +10503,6 @@
     <p:extLst>
       <p:ext uri="{BB962C8B-B14F-4D97-AF65-F5344CB8AC3E}">
         <p14:creationId xmlns:p14="http://schemas.microsoft.com/office/powerpoint/2010/main" val="4236506072"/>
-      </p:ext>
-    </p:extLst>
-  </p:cSld>
-  <p:clrMapOvr>
-    <a:masterClrMapping/>
-  </p:clrMapOvr>
-</p:sld>
-</file>
-
-<file path=ppt/slides/slide9.xml><?xml version="1.0" encoding="utf-8"?>
-<p:sld xmlns:a="http://schemas.openxmlformats.org/drawingml/2006/main" xmlns:r="http://schemas.openxmlformats.org/officeDocument/2006/relationships" xmlns:p="http://schemas.openxmlformats.org/presentationml/2006/main">
-  <p:cSld>
-    <p:spTree>
-      <p:nvGrpSpPr>
-        <p:cNvPr id="1" name=""/>
-        <p:cNvGrpSpPr/>
-        <p:nvPr/>
-      </p:nvGrpSpPr>
-      <p:grpSpPr>
-        <a:xfrm>
-          <a:off x="0" y="0"/>
-          <a:ext cx="0" cy="0"/>
-          <a:chOff x="0" y="0"/>
-          <a:chExt cx="0" cy="0"/>
-        </a:xfrm>
-      </p:grpSpPr>
-      <p:sp>
-        <p:nvSpPr>
-          <p:cNvPr id="2" name="TextBox 1">
-            <a:extLst>
-              <a:ext uri="{FF2B5EF4-FFF2-40B4-BE49-F238E27FC236}">
-                <a16:creationId xmlns:a16="http://schemas.microsoft.com/office/drawing/2014/main" id="{FC485F08-B6EE-BD33-D643-23EBE266E566}"/>
-              </a:ext>
-            </a:extLst>
-          </p:cNvPr>
-          <p:cNvSpPr txBox="1"/>
-          <p:nvPr/>
-        </p:nvSpPr>
-        <p:spPr>
-          <a:xfrm>
-            <a:off x="757084" y="566311"/>
-            <a:ext cx="10677832" cy="2923877"/>
-          </a:xfrm>
-          <a:prstGeom prst="rect">
-            <a:avLst/>
-          </a:prstGeom>
-          <a:noFill/>
-        </p:spPr>
-        <p:txBody>
-          <a:bodyPr wrap="square" rtlCol="0">
-            <a:spAutoFit/>
-          </a:bodyPr>
-          <a:lstStyle/>
-          <a:p>
-            <a:r>
-              <a:rPr lang="en-US" sz="2000" b="1" dirty="0"/>
-              <a:t>Pandas </a:t>
-            </a:r>
-          </a:p>
-          <a:p>
-            <a:endParaRPr lang="en-US" sz="2000" b="1" dirty="0"/>
-          </a:p>
-          <a:p>
-            <a:r>
-              <a:rPr lang="en-IN" dirty="0"/>
-              <a:t>Pandas is a powerful Python library used for data manipulation, data analysis, and data processing.</a:t>
-            </a:r>
-          </a:p>
-          <a:p>
-            <a:r>
-              <a:rPr lang="en-IN" dirty="0"/>
-              <a:t>Pandas helps developers work with large datasets efficiently by providing easy-to-use data structures and built-in functions.</a:t>
-            </a:r>
-          </a:p>
-          <a:p>
-            <a:r>
-              <a:rPr lang="en-IN" b="1" dirty="0"/>
-              <a:t>Data Manipulation:</a:t>
-            </a:r>
-          </a:p>
-          <a:p>
-            <a:r>
-              <a:rPr lang="en-IN" dirty="0"/>
-              <a:t>Data Manipulation is the process of changing, organizing, and preparing raw data so that it becomes useful for analysis and machine learning.</a:t>
-            </a:r>
-          </a:p>
-          <a:p>
-            <a:r>
-              <a:rPr lang="en-IN" b="1" dirty="0"/>
-              <a:t>Modifying Data</a:t>
-            </a:r>
-          </a:p>
-          <a:p>
-            <a:r>
-              <a:rPr lang="en-IN" dirty="0"/>
-              <a:t>Modifying means changing existing data values.</a:t>
-            </a:r>
-          </a:p>
-        </p:txBody>
-      </p:sp>
-      <p:graphicFrame>
-        <p:nvGraphicFramePr>
-          <p:cNvPr id="3" name="Table 2">
-            <a:extLst>
-              <a:ext uri="{FF2B5EF4-FFF2-40B4-BE49-F238E27FC236}">
-                <a16:creationId xmlns:a16="http://schemas.microsoft.com/office/drawing/2014/main" id="{4955E154-6EEB-1AB8-FD9D-5BA6326B1DB8}"/>
-              </a:ext>
-            </a:extLst>
-          </p:cNvPr>
-          <p:cNvGraphicFramePr>
-            <a:graphicFrameLocks noGrp="1"/>
-          </p:cNvGraphicFramePr>
-          <p:nvPr>
-            <p:extLst>
-              <p:ext uri="{D42A27DB-BD31-4B8C-83A1-F6EECF244321}">
-                <p14:modId xmlns:p14="http://schemas.microsoft.com/office/powerpoint/2010/main" val="3200664242"/>
-              </p:ext>
-            </p:extLst>
-          </p:nvPr>
-        </p:nvGraphicFramePr>
-        <p:xfrm>
-          <a:off x="919316" y="3429000"/>
-          <a:ext cx="10515600" cy="1097280"/>
-        </p:xfrm>
-        <a:graphic>
-          <a:graphicData uri="http://schemas.openxmlformats.org/drawingml/2006/table">
-            <a:tbl>
-              <a:tblPr/>
-              <a:tblGrid>
-                <a:gridCol w="5257800">
-                  <a:extLst>
-                    <a:ext uri="{9D8B030D-6E8A-4147-A177-3AD203B41FA5}">
-                      <a16:colId xmlns:a16="http://schemas.microsoft.com/office/drawing/2014/main" val="2152225094"/>
-                    </a:ext>
-                  </a:extLst>
-                </a:gridCol>
-                <a:gridCol w="5257800">
-                  <a:extLst>
-                    <a:ext uri="{9D8B030D-6E8A-4147-A177-3AD203B41FA5}">
-                      <a16:colId xmlns:a16="http://schemas.microsoft.com/office/drawing/2014/main" val="1878350636"/>
-                    </a:ext>
-                  </a:extLst>
-                </a:gridCol>
-              </a:tblGrid>
-              <a:tr h="0">
-                <a:tc>
-                  <a:txBody>
-                    <a:bodyPr/>
-                    <a:lstStyle/>
-                    <a:p>
-                      <a:pPr>
-                        <a:buNone/>
-                      </a:pPr>
-                      <a:r>
-                        <a:rPr lang="en-IN"/>
-                        <a:t>Name</a:t>
-                      </a:r>
-                    </a:p>
-                  </a:txBody>
-                  <a:tcPr anchor="ctr">
-                    <a:lnL>
-                      <a:noFill/>
-                    </a:lnL>
-                    <a:lnR>
-                      <a:noFill/>
-                    </a:lnR>
-                    <a:lnT>
-                      <a:noFill/>
-                    </a:lnT>
-                    <a:lnB>
-                      <a:noFill/>
-                    </a:lnB>
-                    <a:noFill/>
-                  </a:tcPr>
-                </a:tc>
-                <a:tc>
-                  <a:txBody>
-                    <a:bodyPr/>
-                    <a:lstStyle/>
-                    <a:p>
-                      <a:pPr>
-                        <a:buNone/>
-                      </a:pPr>
-                      <a:r>
-                        <a:rPr lang="en-IN"/>
-                        <a:t>Marks</a:t>
-                      </a:r>
-                    </a:p>
-                  </a:txBody>
-                  <a:tcPr anchor="ctr">
-                    <a:lnL>
-                      <a:noFill/>
-                    </a:lnL>
-                    <a:lnR>
-                      <a:noFill/>
-                    </a:lnR>
-                    <a:lnT>
-                      <a:noFill/>
-                    </a:lnT>
-                    <a:lnB>
-                      <a:noFill/>
-                    </a:lnB>
-                    <a:noFill/>
-                  </a:tcPr>
-                </a:tc>
-                <a:extLst>
-                  <a:ext uri="{0D108BD9-81ED-4DB2-BD59-A6C34878D82A}">
-                    <a16:rowId xmlns:a16="http://schemas.microsoft.com/office/drawing/2014/main" val="1680393764"/>
-                  </a:ext>
-                </a:extLst>
-              </a:tr>
-              <a:tr h="0">
-                <a:tc>
-                  <a:txBody>
-                    <a:bodyPr/>
-                    <a:lstStyle/>
-                    <a:p>
-                      <a:pPr>
-                        <a:buNone/>
-                      </a:pPr>
-                      <a:r>
-                        <a:rPr lang="en-IN" dirty="0"/>
-                        <a:t>Ram</a:t>
-                      </a:r>
-                    </a:p>
-                  </a:txBody>
-                  <a:tcPr anchor="ctr">
-                    <a:lnL>
-                      <a:noFill/>
-                    </a:lnL>
-                    <a:lnR>
-                      <a:noFill/>
-                    </a:lnR>
-                    <a:lnT>
-                      <a:noFill/>
-                    </a:lnT>
-                    <a:lnB>
-                      <a:noFill/>
-                    </a:lnB>
-                    <a:noFill/>
-                  </a:tcPr>
-                </a:tc>
-                <a:tc>
-                  <a:txBody>
-                    <a:bodyPr/>
-                    <a:lstStyle/>
-                    <a:p>
-                      <a:pPr>
-                        <a:buNone/>
-                      </a:pPr>
-                      <a:r>
-                        <a:rPr lang="en-IN"/>
-                        <a:t>85</a:t>
-                      </a:r>
-                    </a:p>
-                  </a:txBody>
-                  <a:tcPr anchor="ctr">
-                    <a:lnL>
-                      <a:noFill/>
-                    </a:lnL>
-                    <a:lnR>
-                      <a:noFill/>
-                    </a:lnR>
-                    <a:lnT>
-                      <a:noFill/>
-                    </a:lnT>
-                    <a:lnB>
-                      <a:noFill/>
-                    </a:lnB>
-                    <a:noFill/>
-                  </a:tcPr>
-                </a:tc>
-                <a:extLst>
-                  <a:ext uri="{0D108BD9-81ED-4DB2-BD59-A6C34878D82A}">
-                    <a16:rowId xmlns:a16="http://schemas.microsoft.com/office/drawing/2014/main" val="1687856148"/>
-                  </a:ext>
-                </a:extLst>
-              </a:tr>
-              <a:tr h="0">
-                <a:tc>
-                  <a:txBody>
-                    <a:bodyPr/>
-                    <a:lstStyle/>
-                    <a:p>
-                      <a:pPr>
-                        <a:buNone/>
-                      </a:pPr>
-                      <a:r>
-                        <a:rPr lang="en-IN"/>
-                        <a:t>Ravi</a:t>
-                      </a:r>
-                    </a:p>
-                  </a:txBody>
-                  <a:tcPr anchor="ctr">
-                    <a:lnL>
-                      <a:noFill/>
-                    </a:lnL>
-                    <a:lnR>
-                      <a:noFill/>
-                    </a:lnR>
-                    <a:lnT>
-                      <a:noFill/>
-                    </a:lnT>
-                    <a:lnB>
-                      <a:noFill/>
-                    </a:lnB>
-                    <a:noFill/>
-                  </a:tcPr>
-                </a:tc>
-                <a:tc>
-                  <a:txBody>
-                    <a:bodyPr/>
-                    <a:lstStyle/>
-                    <a:p>
-                      <a:pPr>
-                        <a:buNone/>
-                      </a:pPr>
-                      <a:r>
-                        <a:rPr lang="en-IN" dirty="0"/>
-                        <a:t>50</a:t>
-                      </a:r>
-                    </a:p>
-                  </a:txBody>
-                  <a:tcPr anchor="ctr">
-                    <a:lnL>
-                      <a:noFill/>
-                    </a:lnL>
-                    <a:lnR>
-                      <a:noFill/>
-                    </a:lnR>
-                    <a:lnT>
-                      <a:noFill/>
-                    </a:lnT>
-                    <a:lnB>
-                      <a:noFill/>
-                    </a:lnB>
-                    <a:noFill/>
-                  </a:tcPr>
-                </a:tc>
-                <a:extLst>
-                  <a:ext uri="{0D108BD9-81ED-4DB2-BD59-A6C34878D82A}">
-                    <a16:rowId xmlns:a16="http://schemas.microsoft.com/office/drawing/2014/main" val="922137735"/>
-                  </a:ext>
-                </a:extLst>
-              </a:tr>
-            </a:tbl>
-          </a:graphicData>
-        </a:graphic>
-      </p:graphicFrame>
-      <p:graphicFrame>
-        <p:nvGraphicFramePr>
-          <p:cNvPr id="5" name="Table 4">
-            <a:extLst>
-              <a:ext uri="{FF2B5EF4-FFF2-40B4-BE49-F238E27FC236}">
-                <a16:creationId xmlns:a16="http://schemas.microsoft.com/office/drawing/2014/main" id="{57051844-5712-3115-C46D-550B075FB4AB}"/>
-              </a:ext>
-            </a:extLst>
-          </p:cNvPr>
-          <p:cNvGraphicFramePr>
-            <a:graphicFrameLocks noGrp="1"/>
-          </p:cNvGraphicFramePr>
-          <p:nvPr>
-            <p:extLst>
-              <p:ext uri="{D42A27DB-BD31-4B8C-83A1-F6EECF244321}">
-                <p14:modId xmlns:p14="http://schemas.microsoft.com/office/powerpoint/2010/main" val="3676279019"/>
-              </p:ext>
-            </p:extLst>
-          </p:nvPr>
-        </p:nvGraphicFramePr>
-        <p:xfrm>
-          <a:off x="838200" y="4849762"/>
-          <a:ext cx="10515600" cy="1097280"/>
-        </p:xfrm>
-        <a:graphic>
-          <a:graphicData uri="http://schemas.openxmlformats.org/drawingml/2006/table">
-            <a:tbl>
-              <a:tblPr/>
-              <a:tblGrid>
-                <a:gridCol w="5257800">
-                  <a:extLst>
-                    <a:ext uri="{9D8B030D-6E8A-4147-A177-3AD203B41FA5}">
-                      <a16:colId xmlns:a16="http://schemas.microsoft.com/office/drawing/2014/main" val="1399905966"/>
-                    </a:ext>
-                  </a:extLst>
-                </a:gridCol>
-                <a:gridCol w="5257800">
-                  <a:extLst>
-                    <a:ext uri="{9D8B030D-6E8A-4147-A177-3AD203B41FA5}">
-                      <a16:colId xmlns:a16="http://schemas.microsoft.com/office/drawing/2014/main" val="92278301"/>
-                    </a:ext>
-                  </a:extLst>
-                </a:gridCol>
-              </a:tblGrid>
-              <a:tr h="0">
-                <a:tc>
-                  <a:txBody>
-                    <a:bodyPr/>
-                    <a:lstStyle/>
-                    <a:p>
-                      <a:pPr>
-                        <a:buNone/>
-                      </a:pPr>
-                      <a:r>
-                        <a:rPr lang="en-IN" dirty="0"/>
-                        <a:t>Name</a:t>
-                      </a:r>
-                    </a:p>
-                  </a:txBody>
-                  <a:tcPr anchor="ctr">
-                    <a:lnL>
-                      <a:noFill/>
-                    </a:lnL>
-                    <a:lnR>
-                      <a:noFill/>
-                    </a:lnR>
-                    <a:lnT>
-                      <a:noFill/>
-                    </a:lnT>
-                    <a:lnB>
-                      <a:noFill/>
-                    </a:lnB>
-                    <a:noFill/>
-                  </a:tcPr>
-                </a:tc>
-                <a:tc>
-                  <a:txBody>
-                    <a:bodyPr/>
-                    <a:lstStyle/>
-                    <a:p>
-                      <a:pPr>
-                        <a:buNone/>
-                      </a:pPr>
-                      <a:r>
-                        <a:rPr lang="en-IN"/>
-                        <a:t>Marks</a:t>
-                      </a:r>
-                    </a:p>
-                  </a:txBody>
-                  <a:tcPr anchor="ctr">
-                    <a:lnL>
-                      <a:noFill/>
-                    </a:lnL>
-                    <a:lnR>
-                      <a:noFill/>
-                    </a:lnR>
-                    <a:lnT>
-                      <a:noFill/>
-                    </a:lnT>
-                    <a:lnB>
-                      <a:noFill/>
-                    </a:lnB>
-                    <a:noFill/>
-                  </a:tcPr>
-                </a:tc>
-                <a:extLst>
-                  <a:ext uri="{0D108BD9-81ED-4DB2-BD59-A6C34878D82A}">
-                    <a16:rowId xmlns:a16="http://schemas.microsoft.com/office/drawing/2014/main" val="1230725020"/>
-                  </a:ext>
-                </a:extLst>
-              </a:tr>
-              <a:tr h="0">
-                <a:tc>
-                  <a:txBody>
-                    <a:bodyPr/>
-                    <a:lstStyle/>
-                    <a:p>
-                      <a:pPr>
-                        <a:buNone/>
-                      </a:pPr>
-                      <a:r>
-                        <a:rPr lang="en-IN"/>
-                        <a:t>Ram</a:t>
-                      </a:r>
-                    </a:p>
-                  </a:txBody>
-                  <a:tcPr anchor="ctr">
-                    <a:lnL>
-                      <a:noFill/>
-                    </a:lnL>
-                    <a:lnR>
-                      <a:noFill/>
-                    </a:lnR>
-                    <a:lnT>
-                      <a:noFill/>
-                    </a:lnT>
-                    <a:lnB>
-                      <a:noFill/>
-                    </a:lnB>
-                    <a:noFill/>
-                  </a:tcPr>
-                </a:tc>
-                <a:tc>
-                  <a:txBody>
-                    <a:bodyPr/>
-                    <a:lstStyle/>
-                    <a:p>
-                      <a:pPr>
-                        <a:buNone/>
-                      </a:pPr>
-                      <a:r>
-                        <a:rPr lang="en-IN"/>
-                        <a:t>85</a:t>
-                      </a:r>
-                    </a:p>
-                  </a:txBody>
-                  <a:tcPr anchor="ctr">
-                    <a:lnL>
-                      <a:noFill/>
-                    </a:lnL>
-                    <a:lnR>
-                      <a:noFill/>
-                    </a:lnR>
-                    <a:lnT>
-                      <a:noFill/>
-                    </a:lnT>
-                    <a:lnB>
-                      <a:noFill/>
-                    </a:lnB>
-                    <a:noFill/>
-                  </a:tcPr>
-                </a:tc>
-                <a:extLst>
-                  <a:ext uri="{0D108BD9-81ED-4DB2-BD59-A6C34878D82A}">
-                    <a16:rowId xmlns:a16="http://schemas.microsoft.com/office/drawing/2014/main" val="3282745520"/>
-                  </a:ext>
-                </a:extLst>
-              </a:tr>
-              <a:tr h="0">
-                <a:tc>
-                  <a:txBody>
-                    <a:bodyPr/>
-                    <a:lstStyle/>
-                    <a:p>
-                      <a:pPr>
-                        <a:buNone/>
-                      </a:pPr>
-                      <a:r>
-                        <a:rPr lang="en-IN" dirty="0"/>
-                        <a:t>Ravi</a:t>
-                      </a:r>
-                    </a:p>
-                  </a:txBody>
-                  <a:tcPr anchor="ctr">
-                    <a:lnL>
-                      <a:noFill/>
-                    </a:lnL>
-                    <a:lnR>
-                      <a:noFill/>
-                    </a:lnR>
-                    <a:lnT>
-                      <a:noFill/>
-                    </a:lnT>
-                    <a:lnB>
-                      <a:noFill/>
-                    </a:lnB>
-                    <a:noFill/>
-                  </a:tcPr>
-                </a:tc>
-                <a:tc>
-                  <a:txBody>
-                    <a:bodyPr/>
-                    <a:lstStyle/>
-                    <a:p>
-                      <a:pPr>
-                        <a:buNone/>
-                      </a:pPr>
-                      <a:r>
-                        <a:rPr lang="en-IN" dirty="0"/>
-                        <a:t>90</a:t>
-                      </a:r>
-                    </a:p>
-                  </a:txBody>
-                  <a:tcPr anchor="ctr">
-                    <a:lnL>
-                      <a:noFill/>
-                    </a:lnL>
-                    <a:lnR>
-                      <a:noFill/>
-                    </a:lnR>
-                    <a:lnT>
-                      <a:noFill/>
-                    </a:lnT>
-                    <a:lnB>
-                      <a:noFill/>
-                    </a:lnB>
-                    <a:noFill/>
-                  </a:tcPr>
-                </a:tc>
-                <a:extLst>
-                  <a:ext uri="{0D108BD9-81ED-4DB2-BD59-A6C34878D82A}">
-                    <a16:rowId xmlns:a16="http://schemas.microsoft.com/office/drawing/2014/main" val="1039348066"/>
-                  </a:ext>
-                </a:extLst>
-              </a:tr>
-            </a:tbl>
-          </a:graphicData>
-        </a:graphic>
-      </p:graphicFrame>
-      <p:sp>
-        <p:nvSpPr>
-          <p:cNvPr id="7" name="TextBox 6">
-            <a:extLst>
-              <a:ext uri="{FF2B5EF4-FFF2-40B4-BE49-F238E27FC236}">
-                <a16:creationId xmlns:a16="http://schemas.microsoft.com/office/drawing/2014/main" id="{A3152AE1-E1B2-0870-7F92-5558AEEBB5A9}"/>
-              </a:ext>
-            </a:extLst>
-          </p:cNvPr>
-          <p:cNvSpPr txBox="1"/>
-          <p:nvPr/>
-        </p:nvSpPr>
-        <p:spPr>
-          <a:xfrm>
-            <a:off x="838200" y="4480430"/>
-            <a:ext cx="6096000" cy="369332"/>
-          </a:xfrm>
-          <a:prstGeom prst="rect">
-            <a:avLst/>
-          </a:prstGeom>
-          <a:noFill/>
-        </p:spPr>
-        <p:txBody>
-          <a:bodyPr wrap="square">
-            <a:spAutoFit/>
-          </a:bodyPr>
-          <a:lstStyle/>
-          <a:p>
-            <a:pPr>
-              <a:buNone/>
-            </a:pPr>
-            <a:r>
-              <a:rPr lang="en-IN" dirty="0"/>
-              <a:t>After modification:</a:t>
-            </a:r>
-          </a:p>
-        </p:txBody>
-      </p:sp>
-    </p:spTree>
-    <p:extLst>
-      <p:ext uri="{BB962C8B-B14F-4D97-AF65-F5344CB8AC3E}">
-        <p14:creationId xmlns:p14="http://schemas.microsoft.com/office/powerpoint/2010/main" val="209417965"/>
       </p:ext>
     </p:extLst>
   </p:cSld>

--- a/Library.pptx
+++ b/Library.pptx
@@ -135,6 +135,195 @@
 </p:presentation>
 </file>
 
+<file path=ppt/revisionInfo.xml><?xml version="1.0" encoding="utf-8"?>
+<p1510:revInfo xmlns:a="http://schemas.openxmlformats.org/drawingml/2006/main" xmlns:r="http://schemas.openxmlformats.org/officeDocument/2006/relationships" xmlns:p1510="http://schemas.microsoft.com/office/powerpoint/2015/10/main">
+  <p1510:revLst>
+    <p1510:client id="{BD854014-57C7-4955-B123-3A6B30511388}" v="10" dt="2026-07-16T16:49:24.596"/>
+  </p1510:revLst>
+</p1510:revInfo>
+</file>
+
+<file path=ppt/changesInfos/changesInfo1.xml><?xml version="1.0" encoding="utf-8"?>
+<pc:chgInfo xmlns:a="http://schemas.openxmlformats.org/drawingml/2006/main" xmlns:r="http://schemas.openxmlformats.org/officeDocument/2006/relationships" xmlns:ac="http://schemas.microsoft.com/office/drawing/2013/main/command" xmlns:pc="http://schemas.microsoft.com/office/powerpoint/2013/main/command">
+  <pc:docChgLst>
+    <pc:chgData name="Srilekha Chundu" userId="12833a529d760693" providerId="LiveId" clId="{7CD4201E-082C-4105-A325-FC6B2368A537}"/>
+    <pc:docChg chg="undo custSel modSld sldOrd">
+      <pc:chgData name="Srilekha Chundu" userId="12833a529d760693" providerId="LiveId" clId="{7CD4201E-082C-4105-A325-FC6B2368A537}" dt="2026-07-16T16:49:43.910" v="131" actId="20577"/>
+      <pc:docMkLst>
+        <pc:docMk/>
+      </pc:docMkLst>
+      <pc:sldChg chg="modSp mod">
+        <pc:chgData name="Srilekha Chundu" userId="12833a529d760693" providerId="LiveId" clId="{7CD4201E-082C-4105-A325-FC6B2368A537}" dt="2026-07-16T15:03:14.656" v="15" actId="20577"/>
+        <pc:sldMkLst>
+          <pc:docMk/>
+          <pc:sldMk cId="3919080805" sldId="258"/>
+        </pc:sldMkLst>
+        <pc:spChg chg="mod">
+          <ac:chgData name="Srilekha Chundu" userId="12833a529d760693" providerId="LiveId" clId="{7CD4201E-082C-4105-A325-FC6B2368A537}" dt="2026-07-16T15:03:14.656" v="15" actId="20577"/>
+          <ac:spMkLst>
+            <pc:docMk/>
+            <pc:sldMk cId="3919080805" sldId="258"/>
+            <ac:spMk id="2" creationId="{2421D885-39A9-6D1B-6FBC-966D64EE82A7}"/>
+          </ac:spMkLst>
+        </pc:spChg>
+      </pc:sldChg>
+      <pc:sldChg chg="modSp mod ord">
+        <pc:chgData name="Srilekha Chundu" userId="12833a529d760693" providerId="LiveId" clId="{7CD4201E-082C-4105-A325-FC6B2368A537}" dt="2026-07-16T15:55:52.234" v="19" actId="20577"/>
+        <pc:sldMkLst>
+          <pc:docMk/>
+          <pc:sldMk cId="3052935257" sldId="261"/>
+        </pc:sldMkLst>
+        <pc:spChg chg="mod">
+          <ac:chgData name="Srilekha Chundu" userId="12833a529d760693" providerId="LiveId" clId="{7CD4201E-082C-4105-A325-FC6B2368A537}" dt="2026-07-16T15:55:52.234" v="19" actId="20577"/>
+          <ac:spMkLst>
+            <pc:docMk/>
+            <pc:sldMk cId="3052935257" sldId="261"/>
+            <ac:spMk id="2" creationId="{D122BC1F-9B52-38FD-E408-B755092B3AC0}"/>
+          </ac:spMkLst>
+        </pc:spChg>
+      </pc:sldChg>
+      <pc:sldChg chg="modSp mod">
+        <pc:chgData name="Srilekha Chundu" userId="12833a529d760693" providerId="LiveId" clId="{7CD4201E-082C-4105-A325-FC6B2368A537}" dt="2026-07-16T16:04:31.010" v="39" actId="113"/>
+        <pc:sldMkLst>
+          <pc:docMk/>
+          <pc:sldMk cId="2751357019" sldId="262"/>
+        </pc:sldMkLst>
+        <pc:spChg chg="mod">
+          <ac:chgData name="Srilekha Chundu" userId="12833a529d760693" providerId="LiveId" clId="{7CD4201E-082C-4105-A325-FC6B2368A537}" dt="2026-07-16T16:04:31.010" v="39" actId="113"/>
+          <ac:spMkLst>
+            <pc:docMk/>
+            <pc:sldMk cId="2751357019" sldId="262"/>
+            <ac:spMk id="2" creationId="{4996C6E7-6A54-4037-FE9E-99DB34987532}"/>
+          </ac:spMkLst>
+        </pc:spChg>
+      </pc:sldChg>
+      <pc:sldChg chg="modSp mod">
+        <pc:chgData name="Srilekha Chundu" userId="12833a529d760693" providerId="LiveId" clId="{7CD4201E-082C-4105-A325-FC6B2368A537}" dt="2026-07-16T16:33:51.094" v="90" actId="20577"/>
+        <pc:sldMkLst>
+          <pc:docMk/>
+          <pc:sldMk cId="209417965" sldId="263"/>
+        </pc:sldMkLst>
+        <pc:spChg chg="mod">
+          <ac:chgData name="Srilekha Chundu" userId="12833a529d760693" providerId="LiveId" clId="{7CD4201E-082C-4105-A325-FC6B2368A537}" dt="2026-07-16T16:33:51.094" v="90" actId="20577"/>
+          <ac:spMkLst>
+            <pc:docMk/>
+            <pc:sldMk cId="209417965" sldId="263"/>
+            <ac:spMk id="2" creationId="{FC485F08-B6EE-BD33-D643-23EBE266E566}"/>
+          </ac:spMkLst>
+        </pc:spChg>
+        <pc:spChg chg="mod">
+          <ac:chgData name="Srilekha Chundu" userId="12833a529d760693" providerId="LiveId" clId="{7CD4201E-082C-4105-A325-FC6B2368A537}" dt="2026-07-16T16:32:57.007" v="83" actId="1076"/>
+          <ac:spMkLst>
+            <pc:docMk/>
+            <pc:sldMk cId="209417965" sldId="263"/>
+            <ac:spMk id="7" creationId="{A3152AE1-E1B2-0870-7F92-5558AEEBB5A9}"/>
+          </ac:spMkLst>
+        </pc:spChg>
+        <pc:graphicFrameChg chg="mod">
+          <ac:chgData name="Srilekha Chundu" userId="12833a529d760693" providerId="LiveId" clId="{7CD4201E-082C-4105-A325-FC6B2368A537}" dt="2026-07-16T16:33:03.187" v="84" actId="1076"/>
+          <ac:graphicFrameMkLst>
+            <pc:docMk/>
+            <pc:sldMk cId="209417965" sldId="263"/>
+            <ac:graphicFrameMk id="3" creationId="{4955E154-6EEB-1AB8-FD9D-5BA6326B1DB8}"/>
+          </ac:graphicFrameMkLst>
+        </pc:graphicFrameChg>
+        <pc:graphicFrameChg chg="mod">
+          <ac:chgData name="Srilekha Chundu" userId="12833a529d760693" providerId="LiveId" clId="{7CD4201E-082C-4105-A325-FC6B2368A537}" dt="2026-07-16T16:32:51.785" v="82" actId="1076"/>
+          <ac:graphicFrameMkLst>
+            <pc:docMk/>
+            <pc:sldMk cId="209417965" sldId="263"/>
+            <ac:graphicFrameMk id="5" creationId="{57051844-5712-3115-C46D-550B075FB4AB}"/>
+          </ac:graphicFrameMkLst>
+        </pc:graphicFrameChg>
+      </pc:sldChg>
+      <pc:sldChg chg="modSp mod">
+        <pc:chgData name="Srilekha Chundu" userId="12833a529d760693" providerId="LiveId" clId="{7CD4201E-082C-4105-A325-FC6B2368A537}" dt="2026-07-16T16:05:52.419" v="40" actId="14734"/>
+        <pc:sldMkLst>
+          <pc:docMk/>
+          <pc:sldMk cId="4236506072" sldId="264"/>
+        </pc:sldMkLst>
+        <pc:graphicFrameChg chg="modGraphic">
+          <ac:chgData name="Srilekha Chundu" userId="12833a529d760693" providerId="LiveId" clId="{7CD4201E-082C-4105-A325-FC6B2368A537}" dt="2026-07-16T16:05:52.419" v="40" actId="14734"/>
+          <ac:graphicFrameMkLst>
+            <pc:docMk/>
+            <pc:sldMk cId="4236506072" sldId="264"/>
+            <ac:graphicFrameMk id="3" creationId="{0ACC5ED3-00E8-4893-0B44-07C18C5BB7E4}"/>
+          </ac:graphicFrameMkLst>
+        </pc:graphicFrameChg>
+      </pc:sldChg>
+      <pc:sldChg chg="modSp mod">
+        <pc:chgData name="Srilekha Chundu" userId="12833a529d760693" providerId="LiveId" clId="{7CD4201E-082C-4105-A325-FC6B2368A537}" dt="2026-07-16T16:35:31.684" v="109" actId="1076"/>
+        <pc:sldMkLst>
+          <pc:docMk/>
+          <pc:sldMk cId="2102504596" sldId="266"/>
+        </pc:sldMkLst>
+        <pc:spChg chg="mod">
+          <ac:chgData name="Srilekha Chundu" userId="12833a529d760693" providerId="LiveId" clId="{7CD4201E-082C-4105-A325-FC6B2368A537}" dt="2026-07-16T16:35:22.886" v="108" actId="20577"/>
+          <ac:spMkLst>
+            <pc:docMk/>
+            <pc:sldMk cId="2102504596" sldId="266"/>
+            <ac:spMk id="2" creationId="{BB63206E-E328-6233-666C-90AC0BB2D3A3}"/>
+          </ac:spMkLst>
+        </pc:spChg>
+        <pc:graphicFrameChg chg="mod">
+          <ac:chgData name="Srilekha Chundu" userId="12833a529d760693" providerId="LiveId" clId="{7CD4201E-082C-4105-A325-FC6B2368A537}" dt="2026-07-16T16:35:31.684" v="109" actId="1076"/>
+          <ac:graphicFrameMkLst>
+            <pc:docMk/>
+            <pc:sldMk cId="2102504596" sldId="266"/>
+            <ac:graphicFrameMk id="3" creationId="{A619687A-0FED-F5AF-304B-22381C23A667}"/>
+          </ac:graphicFrameMkLst>
+        </pc:graphicFrameChg>
+      </pc:sldChg>
+      <pc:sldChg chg="modSp mod">
+        <pc:chgData name="Srilekha Chundu" userId="12833a529d760693" providerId="LiveId" clId="{7CD4201E-082C-4105-A325-FC6B2368A537}" dt="2026-07-16T16:35:13.479" v="107" actId="113"/>
+        <pc:sldMkLst>
+          <pc:docMk/>
+          <pc:sldMk cId="3833523666" sldId="267"/>
+        </pc:sldMkLst>
+        <pc:spChg chg="mod">
+          <ac:chgData name="Srilekha Chundu" userId="12833a529d760693" providerId="LiveId" clId="{7CD4201E-082C-4105-A325-FC6B2368A537}" dt="2026-07-16T16:35:13.479" v="107" actId="113"/>
+          <ac:spMkLst>
+            <pc:docMk/>
+            <pc:sldMk cId="3833523666" sldId="267"/>
+            <ac:spMk id="2" creationId="{02D6FD10-B9C2-E672-FB82-29E5127ED78E}"/>
+          </ac:spMkLst>
+        </pc:spChg>
+      </pc:sldChg>
+      <pc:sldChg chg="modSp mod">
+        <pc:chgData name="Srilekha Chundu" userId="12833a529d760693" providerId="LiveId" clId="{7CD4201E-082C-4105-A325-FC6B2368A537}" dt="2026-07-16T16:39:47.088" v="126" actId="113"/>
+        <pc:sldMkLst>
+          <pc:docMk/>
+          <pc:sldMk cId="1922014933" sldId="268"/>
+        </pc:sldMkLst>
+        <pc:spChg chg="mod">
+          <ac:chgData name="Srilekha Chundu" userId="12833a529d760693" providerId="LiveId" clId="{7CD4201E-082C-4105-A325-FC6B2368A537}" dt="2026-07-16T16:39:47.088" v="126" actId="113"/>
+          <ac:spMkLst>
+            <pc:docMk/>
+            <pc:sldMk cId="1922014933" sldId="268"/>
+            <ac:spMk id="2" creationId="{75AC2E1D-2F0A-0C5A-5B75-D374854162B7}"/>
+          </ac:spMkLst>
+        </pc:spChg>
+      </pc:sldChg>
+      <pc:sldChg chg="modSp mod">
+        <pc:chgData name="Srilekha Chundu" userId="12833a529d760693" providerId="LiveId" clId="{7CD4201E-082C-4105-A325-FC6B2368A537}" dt="2026-07-16T16:49:43.910" v="131" actId="20577"/>
+        <pc:sldMkLst>
+          <pc:docMk/>
+          <pc:sldMk cId="2607546937" sldId="273"/>
+        </pc:sldMkLst>
+        <pc:spChg chg="mod">
+          <ac:chgData name="Srilekha Chundu" userId="12833a529d760693" providerId="LiveId" clId="{7CD4201E-082C-4105-A325-FC6B2368A537}" dt="2026-07-16T16:49:43.910" v="131" actId="20577"/>
+          <ac:spMkLst>
+            <pc:docMk/>
+            <pc:sldMk cId="2607546937" sldId="273"/>
+            <ac:spMk id="2" creationId="{761D2BFD-B907-4B78-3F48-51A768919113}"/>
+          </ac:spMkLst>
+        </pc:spChg>
+      </pc:sldChg>
+    </pc:docChg>
+  </pc:docChgLst>
+</pc:chgInfo>
+</file>
+
 <file path=ppt/slideLayouts/slideLayout1.xml><?xml version="1.0" encoding="utf-8"?>
 <p:sldLayout xmlns:a="http://schemas.openxmlformats.org/drawingml/2006/main" xmlns:r="http://schemas.openxmlformats.org/officeDocument/2006/relationships" xmlns:p="http://schemas.openxmlformats.org/presentationml/2006/main" type="title" preserve="1">
   <p:cSld name="Title Slide">
@@ -284,7 +473,7 @@
           <a:p>
             <a:fld id="{1E29E131-89F4-4BF3-B8CF-85E9E906BC4C}" type="datetimeFigureOut">
               <a:rPr lang="en-IN" smtClean="0"/>
-              <a:t>15-07-2026</a:t>
+              <a:t>16-07-2026</a:t>
             </a:fld>
             <a:endParaRPr lang="en-IN"/>
           </a:p>
@@ -484,7 +673,7 @@
           <a:p>
             <a:fld id="{1E29E131-89F4-4BF3-B8CF-85E9E906BC4C}" type="datetimeFigureOut">
               <a:rPr lang="en-IN" smtClean="0"/>
-              <a:t>15-07-2026</a:t>
+              <a:t>16-07-2026</a:t>
             </a:fld>
             <a:endParaRPr lang="en-IN"/>
           </a:p>
@@ -694,7 +883,7 @@
           <a:p>
             <a:fld id="{1E29E131-89F4-4BF3-B8CF-85E9E906BC4C}" type="datetimeFigureOut">
               <a:rPr lang="en-IN" smtClean="0"/>
-              <a:t>15-07-2026</a:t>
+              <a:t>16-07-2026</a:t>
             </a:fld>
             <a:endParaRPr lang="en-IN"/>
           </a:p>
@@ -894,7 +1083,7 @@
           <a:p>
             <a:fld id="{1E29E131-89F4-4BF3-B8CF-85E9E906BC4C}" type="datetimeFigureOut">
               <a:rPr lang="en-IN" smtClean="0"/>
-              <a:t>15-07-2026</a:t>
+              <a:t>16-07-2026</a:t>
             </a:fld>
             <a:endParaRPr lang="en-IN"/>
           </a:p>
@@ -1170,7 +1359,7 @@
           <a:p>
             <a:fld id="{1E29E131-89F4-4BF3-B8CF-85E9E906BC4C}" type="datetimeFigureOut">
               <a:rPr lang="en-IN" smtClean="0"/>
-              <a:t>15-07-2026</a:t>
+              <a:t>16-07-2026</a:t>
             </a:fld>
             <a:endParaRPr lang="en-IN"/>
           </a:p>
@@ -1438,7 +1627,7 @@
           <a:p>
             <a:fld id="{1E29E131-89F4-4BF3-B8CF-85E9E906BC4C}" type="datetimeFigureOut">
               <a:rPr lang="en-IN" smtClean="0"/>
-              <a:t>15-07-2026</a:t>
+              <a:t>16-07-2026</a:t>
             </a:fld>
             <a:endParaRPr lang="en-IN"/>
           </a:p>
@@ -1853,7 +2042,7 @@
           <a:p>
             <a:fld id="{1E29E131-89F4-4BF3-B8CF-85E9E906BC4C}" type="datetimeFigureOut">
               <a:rPr lang="en-IN" smtClean="0"/>
-              <a:t>15-07-2026</a:t>
+              <a:t>16-07-2026</a:t>
             </a:fld>
             <a:endParaRPr lang="en-IN"/>
           </a:p>
@@ -1995,7 +2184,7 @@
           <a:p>
             <a:fld id="{1E29E131-89F4-4BF3-B8CF-85E9E906BC4C}" type="datetimeFigureOut">
               <a:rPr lang="en-IN" smtClean="0"/>
-              <a:t>15-07-2026</a:t>
+              <a:t>16-07-2026</a:t>
             </a:fld>
             <a:endParaRPr lang="en-IN"/>
           </a:p>
@@ -2108,7 +2297,7 @@
           <a:p>
             <a:fld id="{1E29E131-89F4-4BF3-B8CF-85E9E906BC4C}" type="datetimeFigureOut">
               <a:rPr lang="en-IN" smtClean="0"/>
-              <a:t>15-07-2026</a:t>
+              <a:t>16-07-2026</a:t>
             </a:fld>
             <a:endParaRPr lang="en-IN"/>
           </a:p>
@@ -2421,7 +2610,7 @@
           <a:p>
             <a:fld id="{1E29E131-89F4-4BF3-B8CF-85E9E906BC4C}" type="datetimeFigureOut">
               <a:rPr lang="en-IN" smtClean="0"/>
-              <a:t>15-07-2026</a:t>
+              <a:t>16-07-2026</a:t>
             </a:fld>
             <a:endParaRPr lang="en-IN"/>
           </a:p>
@@ -2710,7 +2899,7 @@
           <a:p>
             <a:fld id="{1E29E131-89F4-4BF3-B8CF-85E9E906BC4C}" type="datetimeFigureOut">
               <a:rPr lang="en-IN" smtClean="0"/>
-              <a:t>15-07-2026</a:t>
+              <a:t>16-07-2026</a:t>
             </a:fld>
             <a:endParaRPr lang="en-IN"/>
           </a:p>
@@ -2953,7 +3142,7 @@
           <a:p>
             <a:fld id="{1E29E131-89F4-4BF3-B8CF-85E9E906BC4C}" type="datetimeFigureOut">
               <a:rPr lang="en-IN" smtClean="0"/>
-              <a:t>15-07-2026</a:t>
+              <a:t>16-07-2026</a:t>
             </a:fld>
             <a:endParaRPr lang="en-IN"/>
           </a:p>
@@ -3447,8 +3636,8 @@
         </p:nvSpPr>
         <p:spPr>
           <a:xfrm>
-            <a:off x="757084" y="566311"/>
-            <a:ext cx="10677832" cy="2923877"/>
+            <a:off x="594852" y="146190"/>
+            <a:ext cx="10677832" cy="3477875"/>
           </a:xfrm>
           <a:prstGeom prst="rect">
             <a:avLst/>
@@ -3477,8 +3666,32 @@
           </a:p>
           <a:p>
             <a:r>
-              <a:rPr lang="en-IN" dirty="0"/>
-              <a:t>Pandas helps developers work with large datasets efficiently by providing easy-to-use data structures and built-in functions.</a:t>
+              <a:rPr lang="en-IN" b="1" dirty="0"/>
+              <a:t>Without Pandas:</a:t>
+            </a:r>
+          </a:p>
+          <a:p>
+            <a:r>
+              <a:rPr lang="en-IN" dirty="0"/>
+              <a:t>Reading large files is difficult </a:t>
+            </a:r>
+          </a:p>
+          <a:p>
+            <a:r>
+              <a:rPr lang="en-IN" dirty="0"/>
+              <a:t>Filtering data requires many loops </a:t>
+            </a:r>
+          </a:p>
+          <a:p>
+            <a:r>
+              <a:rPr lang="en-IN" dirty="0"/>
+              <a:t>Handling missing values is complicated </a:t>
+            </a:r>
+          </a:p>
+          <a:p>
+            <a:r>
+              <a:rPr lang="en-IN" dirty="0"/>
+              <a:t>Data analysis takes more code </a:t>
             </a:r>
           </a:p>
           <a:p>
@@ -3491,12 +3704,6 @@
             <a:r>
               <a:rPr lang="en-IN" dirty="0"/>
               <a:t>Data Manipulation is the process of changing, organizing, and preparing raw data so that it becomes useful for analysis and machine learning.</a:t>
-            </a:r>
-          </a:p>
-          <a:p>
-            <a:r>
-              <a:rPr lang="en-IN" b="1" dirty="0"/>
-              <a:t>Modifying Data</a:t>
             </a:r>
           </a:p>
           <a:p>
@@ -3522,13 +3729,13 @@
           <p:nvPr>
             <p:extLst>
               <p:ext uri="{D42A27DB-BD31-4B8C-83A1-F6EECF244321}">
-                <p14:modId xmlns:p14="http://schemas.microsoft.com/office/powerpoint/2010/main" val="3200664242"/>
+                <p14:modId xmlns:p14="http://schemas.microsoft.com/office/powerpoint/2010/main" val="3840058315"/>
               </p:ext>
             </p:extLst>
           </p:nvPr>
         </p:nvGraphicFramePr>
         <p:xfrm>
-          <a:off x="919316" y="3429000"/>
+          <a:off x="1074174" y="3848163"/>
           <a:ext cx="10515600" cy="1097280"/>
         </p:xfrm>
         <a:graphic>
@@ -3695,7 +3902,7 @@
                         <a:buNone/>
                       </a:pPr>
                       <a:r>
-                        <a:rPr lang="en-IN"/>
+                        <a:rPr lang="en-IN" dirty="0"/>
                         <a:t>Ravi</a:t>
                       </a:r>
                     </a:p>
@@ -3771,13 +3978,13 @@
           <p:nvPr>
             <p:extLst>
               <p:ext uri="{D42A27DB-BD31-4B8C-83A1-F6EECF244321}">
-                <p14:modId xmlns:p14="http://schemas.microsoft.com/office/powerpoint/2010/main" val="3676279019"/>
+                <p14:modId xmlns:p14="http://schemas.microsoft.com/office/powerpoint/2010/main" val="2289372352"/>
               </p:ext>
             </p:extLst>
           </p:nvPr>
         </p:nvGraphicFramePr>
         <p:xfrm>
-          <a:off x="838200" y="4849762"/>
+          <a:off x="1074174" y="5233220"/>
           <a:ext cx="10515600" cy="1097280"/>
         </p:xfrm>
         <a:graphic>
@@ -3877,7 +4084,7 @@
                         <a:buNone/>
                       </a:pPr>
                       <a:r>
-                        <a:rPr lang="en-IN"/>
+                        <a:rPr lang="en-IN" dirty="0"/>
                         <a:t>Ram</a:t>
                       </a:r>
                     </a:p>
@@ -4019,7 +4226,7 @@
         </p:nvSpPr>
         <p:spPr>
           <a:xfrm>
-            <a:off x="838200" y="4480430"/>
+            <a:off x="1074174" y="4863888"/>
             <a:ext cx="6096000" cy="369332"/>
           </a:xfrm>
           <a:prstGeom prst="rect">
@@ -4667,7 +4874,7 @@
         <p:spPr>
           <a:xfrm>
             <a:off x="497305" y="705853"/>
-            <a:ext cx="11053011" cy="2862322"/>
+            <a:ext cx="11053011" cy="2585323"/>
           </a:xfrm>
           <a:prstGeom prst="rect">
             <a:avLst/>
@@ -4690,9 +4897,6 @@
               <a:rPr lang="en-IN" dirty="0"/>
               <a:t>Transforming means converting data from one format into another.</a:t>
             </a:r>
-          </a:p>
-          <a:p>
-            <a:endParaRPr lang="en-IN" dirty="0"/>
           </a:p>
           <a:p>
             <a:r>
@@ -4744,10 +4948,16 @@
           <p:cNvGraphicFramePr>
             <a:graphicFrameLocks noGrp="1"/>
           </p:cNvGraphicFramePr>
-          <p:nvPr/>
+          <p:nvPr>
+            <p:extLst>
+              <p:ext uri="{D42A27DB-BD31-4B8C-83A1-F6EECF244321}">
+                <p14:modId xmlns:p14="http://schemas.microsoft.com/office/powerpoint/2010/main" val="1559665444"/>
+              </p:ext>
+            </p:extLst>
+          </p:nvPr>
         </p:nvGraphicFramePr>
         <p:xfrm>
-          <a:off x="838200" y="3269774"/>
+          <a:off x="766010" y="3062130"/>
           <a:ext cx="10515600" cy="1463040"/>
         </p:xfrm>
         <a:graphic>
@@ -4847,7 +5057,7 @@
                         <a:buNone/>
                       </a:pPr>
                       <a:r>
-                        <a:rPr lang="en-IN"/>
+                        <a:rPr lang="en-IN" dirty="0"/>
                         <a:t>Ram</a:t>
                       </a:r>
                     </a:p>
@@ -5011,7 +5221,7 @@
                         <a:buNone/>
                       </a:pPr>
                       <a:r>
-                        <a:rPr lang="en-IN"/>
+                        <a:rPr lang="en-IN" dirty="0"/>
                         <a:t>95</a:t>
                       </a:r>
                     </a:p>
@@ -5399,7 +5609,7 @@
             </a:r>
             <a:r>
               <a:rPr lang="en-IN" dirty="0"/>
-              <a:t> is the process of examining data to discover useful information, patterns, trends, and insights that help in decision-making.</a:t>
+              <a:t> is the process of examining data to discover useful information and patterns that help in decision-making.</a:t>
             </a:r>
           </a:p>
           <a:p>
@@ -5417,7 +5627,14 @@
             </a:r>
           </a:p>
           <a:p>
-            <a:endParaRPr lang="en-IN" dirty="0"/>
+            <a:r>
+              <a:rPr lang="en-IN" b="1" dirty="0"/>
+              <a:t>Installation : </a:t>
+            </a:r>
+            <a:r>
+              <a:rPr lang="en-IN" dirty="0"/>
+              <a:t>pip install pandas</a:t>
+            </a:r>
           </a:p>
           <a:p>
             <a:r>
@@ -5508,13 +5725,8 @@
             </a:r>
             <a:r>
               <a:rPr lang="en-IN" dirty="0"/>
-              <a:t>("students.</a:t>
-            </a:r>
-            <a:r>
-              <a:rPr lang="en-IN"/>
-              <a:t>csv")</a:t>
-            </a:r>
-            <a:endParaRPr lang="en-IN" dirty="0"/>
+              <a:t>("students.csv")</a:t>
+            </a:r>
           </a:p>
           <a:p>
             <a:r>
@@ -5577,7 +5789,7 @@
         <p:spPr>
           <a:xfrm>
             <a:off x="609600" y="467848"/>
-            <a:ext cx="10972800" cy="5693866"/>
+            <a:ext cx="10972800" cy="5970865"/>
           </a:xfrm>
           <a:prstGeom prst="rect">
             <a:avLst/>
@@ -5605,7 +5817,14 @@
             </a:r>
           </a:p>
           <a:p>
-            <a:endParaRPr lang="en-IN" dirty="0"/>
+            <a:r>
+              <a:rPr lang="en-IN" b="1" dirty="0"/>
+              <a:t>Installation: </a:t>
+            </a:r>
+            <a:r>
+              <a:rPr lang="en-IN" dirty="0"/>
+              <a:t>pip install matplotlib</a:t>
+            </a:r>
           </a:p>
           <a:p>
             <a:r>
@@ -5630,6 +5849,9 @@
               <a:rPr lang="en-US" dirty="0" err="1"/>
               <a:t>plt</a:t>
             </a:r>
+            <a:endParaRPr lang="en-US" dirty="0"/>
+          </a:p>
+          <a:p>
             <a:endParaRPr lang="en-US" dirty="0"/>
           </a:p>
           <a:p>
@@ -6760,7 +6982,7 @@
         <p:spPr>
           <a:xfrm>
             <a:off x="740229" y="636814"/>
-            <a:ext cx="10711542" cy="5078313"/>
+            <a:ext cx="10711542" cy="5909310"/>
           </a:xfrm>
           <a:prstGeom prst="rect">
             <a:avLst/>
@@ -6774,11 +6996,51 @@
           <a:lstStyle/>
           <a:p>
             <a:r>
+              <a:rPr lang="en-IN" dirty="0"/>
+              <a:t>Before TensorFlow, developers had to manually write:</a:t>
+            </a:r>
+          </a:p>
+          <a:p>
+            <a:endParaRPr lang="en-IN" dirty="0"/>
+          </a:p>
+          <a:p>
+            <a:r>
+              <a:rPr lang="en-IN" dirty="0"/>
+              <a:t>Matrix calculations </a:t>
+            </a:r>
+          </a:p>
+          <a:p>
+            <a:r>
+              <a:rPr lang="en-IN" dirty="0"/>
+              <a:t>Gradient calculations </a:t>
+            </a:r>
+          </a:p>
+          <a:p>
+            <a:r>
+              <a:rPr lang="en-IN" dirty="0"/>
+              <a:t>Backpropagation algorithms </a:t>
+            </a:r>
+          </a:p>
+          <a:p>
+            <a:r>
+              <a:rPr lang="en-IN" dirty="0"/>
+              <a:t>Weight updates </a:t>
+            </a:r>
+          </a:p>
+          <a:p>
+            <a:r>
+              <a:rPr lang="en-IN" dirty="0"/>
+              <a:t>Neural network architectures</a:t>
+            </a:r>
+          </a:p>
+          <a:p>
+            <a:endParaRPr lang="en-IN" b="1" dirty="0"/>
+          </a:p>
+          <a:p>
+            <a:r>
               <a:rPr lang="en-IN" b="1" dirty="0"/>
               <a:t>TensorFlow Workflow</a:t>
             </a:r>
-          </a:p>
-          <a:p>
             <a:endParaRPr lang="en-IN" dirty="0"/>
           </a:p>
           <a:p>
@@ -6849,30 +7111,6 @@
           </a:p>
           <a:p>
             <a:endParaRPr lang="en-IN" dirty="0"/>
-          </a:p>
-          <a:p>
-            <a:r>
-              <a:rPr lang="en-IN" b="1" dirty="0"/>
-              <a:t>Applications:</a:t>
-            </a:r>
-          </a:p>
-          <a:p>
-            <a:r>
-              <a:rPr lang="en-IN" dirty="0"/>
-              <a:t>Image Classification</a:t>
-            </a:r>
-          </a:p>
-          <a:p>
-            <a:r>
-              <a:rPr lang="en-IN" dirty="0"/>
-              <a:t>NLP</a:t>
-            </a:r>
-          </a:p>
-          <a:p>
-            <a:r>
-              <a:rPr lang="en-IN" dirty="0"/>
-              <a:t>Neural networks</a:t>
-            </a:r>
           </a:p>
         </p:txBody>
       </p:sp>
@@ -8132,7 +8370,7 @@
         <p:spPr>
           <a:xfrm>
             <a:off x="549729" y="500743"/>
-            <a:ext cx="11092542" cy="5447645"/>
+            <a:ext cx="11092542" cy="5170646"/>
           </a:xfrm>
           <a:prstGeom prst="rect">
             <a:avLst/>
@@ -8151,28 +8389,19 @@
             </a:r>
             <a:r>
               <a:rPr lang="en-IN" sz="2400" b="1" dirty="0"/>
-              <a:t>What is  a library?</a:t>
-            </a:r>
-          </a:p>
-          <a:p>
-            <a:r>
-              <a:rPr lang="en-IN" dirty="0"/>
-              <a:t>A library is a collection of pre-written code, functions, classes, and modules.</a:t>
-            </a:r>
-          </a:p>
-          <a:p>
-            <a:r>
-              <a:rPr lang="en-IN" dirty="0"/>
-              <a:t>Helps to not built every thing from scratch</a:t>
-            </a:r>
-          </a:p>
-          <a:p>
-            <a:endParaRPr lang="en-IN" dirty="0"/>
+              <a:t>What is a library?</a:t>
+            </a:r>
+          </a:p>
+          <a:p>
+            <a:r>
+              <a:rPr lang="en-IN" dirty="0"/>
+              <a:t>A library is a collection of pre-written, reusable code that helps developers perform specific tasks efficiently without writing everything from scratch.</a:t>
+            </a:r>
           </a:p>
           <a:p>
             <a:r>
               <a:rPr lang="en-IN" b="1" dirty="0"/>
-              <a:t>Real word example: </a:t>
+              <a:t>Real-world example: </a:t>
             </a:r>
           </a:p>
           <a:p>
@@ -8850,7 +9079,7 @@
                         <a:buNone/>
                       </a:pPr>
                       <a:r>
-                        <a:rPr lang="en-IN"/>
+                        <a:rPr lang="en-IN" dirty="0"/>
                         <a:t>4</a:t>
                       </a:r>
                     </a:p>
@@ -9101,8 +9330,8 @@
         </p:nvSpPr>
         <p:spPr>
           <a:xfrm>
-            <a:off x="721895" y="705853"/>
-            <a:ext cx="10748210" cy="3277820"/>
+            <a:off x="830050" y="794344"/>
+            <a:ext cx="10748210" cy="5216813"/>
           </a:xfrm>
           <a:prstGeom prst="rect">
             <a:avLst/>
@@ -9134,6 +9363,72 @@
             <a:r>
               <a:rPr lang="en-IN" dirty="0"/>
               <a:t>Neural Networks are the foundation of modern AI systems.</a:t>
+            </a:r>
+          </a:p>
+          <a:p>
+            <a:r>
+              <a:rPr lang="en-IN" dirty="0"/>
+              <a:t>To build a neural network manually, developers must:</a:t>
+            </a:r>
+          </a:p>
+          <a:p>
+            <a:pPr marL="285750" indent="-285750">
+              <a:buFont typeface="Arial" panose="020B0604020202020204" pitchFamily="34" charset="0"/>
+              <a:buChar char="•"/>
+            </a:pPr>
+            <a:r>
+              <a:rPr lang="en-IN" dirty="0"/>
+              <a:t>Create neurons </a:t>
+            </a:r>
+          </a:p>
+          <a:p>
+            <a:pPr marL="285750" indent="-285750">
+              <a:buFont typeface="Arial" panose="020B0604020202020204" pitchFamily="34" charset="0"/>
+              <a:buChar char="•"/>
+            </a:pPr>
+            <a:r>
+              <a:rPr lang="en-IN" dirty="0"/>
+              <a:t>Initialize weights </a:t>
+            </a:r>
+          </a:p>
+          <a:p>
+            <a:pPr marL="285750" indent="-285750">
+              <a:buFont typeface="Arial" panose="020B0604020202020204" pitchFamily="34" charset="0"/>
+              <a:buChar char="•"/>
+            </a:pPr>
+            <a:r>
+              <a:rPr lang="en-IN" dirty="0"/>
+              <a:t>Calculate outputs </a:t>
+            </a:r>
+          </a:p>
+          <a:p>
+            <a:pPr marL="285750" indent="-285750">
+              <a:buFont typeface="Arial" panose="020B0604020202020204" pitchFamily="34" charset="0"/>
+              <a:buChar char="•"/>
+            </a:pPr>
+            <a:r>
+              <a:rPr lang="en-IN" dirty="0"/>
+              <a:t>Compute errors </a:t>
+            </a:r>
+          </a:p>
+          <a:p>
+            <a:pPr marL="285750" indent="-285750">
+              <a:buFont typeface="Arial" panose="020B0604020202020204" pitchFamily="34" charset="0"/>
+              <a:buChar char="•"/>
+            </a:pPr>
+            <a:r>
+              <a:rPr lang="en-IN" dirty="0"/>
+              <a:t>Perform backpropagation </a:t>
+            </a:r>
+          </a:p>
+          <a:p>
+            <a:pPr marL="285750" indent="-285750">
+              <a:buFont typeface="Arial" panose="020B0604020202020204" pitchFamily="34" charset="0"/>
+              <a:buChar char="•"/>
+            </a:pPr>
+            <a:r>
+              <a:rPr lang="en-IN" dirty="0"/>
+              <a:t>Update weights</a:t>
             </a:r>
           </a:p>
           <a:p>
@@ -9460,8 +9755,8 @@
         </p:nvSpPr>
         <p:spPr>
           <a:xfrm>
-            <a:off x="558036" y="719030"/>
-            <a:ext cx="11245516" cy="4616648"/>
+            <a:off x="473242" y="699366"/>
+            <a:ext cx="11245516" cy="5170646"/>
           </a:xfrm>
           <a:prstGeom prst="rect">
             <a:avLst/>
@@ -9497,6 +9792,31 @@
               <a:rPr lang="en-IN" dirty="0"/>
               <a:t>Used for numerical computing and mathematical operations.</a:t>
             </a:r>
+          </a:p>
+          <a:p>
+            <a:r>
+              <a:rPr lang="en-IN" dirty="0"/>
+              <a:t>NumPy provides a powerful object called an </a:t>
+            </a:r>
+            <a:r>
+              <a:rPr lang="en-IN" b="1" dirty="0"/>
+              <a:t>Array</a:t>
+            </a:r>
+          </a:p>
+          <a:p>
+            <a:r>
+              <a:rPr lang="en-IN" b="1" dirty="0"/>
+              <a:t>Installation: </a:t>
+            </a:r>
+            <a:r>
+              <a:rPr lang="en-IN" dirty="0"/>
+              <a:t>pip install </a:t>
+            </a:r>
+            <a:r>
+              <a:rPr lang="en-IN" dirty="0" err="1"/>
+              <a:t>numpy</a:t>
+            </a:r>
+            <a:endParaRPr lang="en-IN" dirty="0"/>
           </a:p>
           <a:p>
             <a:r>
@@ -9643,21 +9963,21 @@
           <p:nvPr>
             <p:extLst>
               <p:ext uri="{D42A27DB-BD31-4B8C-83A1-F6EECF244321}">
-                <p14:modId xmlns:p14="http://schemas.microsoft.com/office/powerpoint/2010/main" val="1156911963"/>
+                <p14:modId xmlns:p14="http://schemas.microsoft.com/office/powerpoint/2010/main" val="3821627558"/>
               </p:ext>
             </p:extLst>
           </p:nvPr>
         </p:nvGraphicFramePr>
         <p:xfrm>
-          <a:off x="838200" y="1645920"/>
-          <a:ext cx="10515600" cy="3566160"/>
+          <a:off x="835742" y="1645920"/>
+          <a:ext cx="10518058" cy="3566160"/>
         </p:xfrm>
         <a:graphic>
           <a:graphicData uri="http://schemas.openxmlformats.org/drawingml/2006/table">
             <a:tbl>
               <a:tblPr/>
               <a:tblGrid>
-                <a:gridCol w="5257800">
+                <a:gridCol w="5260258">
                   <a:extLst>
                     <a:ext uri="{9D8B030D-6E8A-4147-A177-3AD203B41FA5}">
                       <a16:colId xmlns:a16="http://schemas.microsoft.com/office/drawing/2014/main" val="80566225"/>
@@ -10322,32 +10642,38 @@
                         <a:buNone/>
                       </a:pPr>
                       <a:r>
-                        <a:rPr lang="en-IN" sz="2000">
+                        <a:rPr lang="en-IN" sz="2000" dirty="0">
                           <a:latin typeface="Courier New" panose="02070309020205020404" pitchFamily="49" charset="0"/>
                         </a:rPr>
                         <a:t>median()</a:t>
                       </a:r>
                       <a:r>
-                        <a:rPr lang="en-IN" sz="2000"/>
+                        <a:rPr lang="en-IN" sz="2000" dirty="0"/>
                         <a:t>, </a:t>
                       </a:r>
                       <a:r>
-                        <a:rPr lang="en-IN" sz="2000">
+                        <a:rPr lang="en-IN" sz="2000" dirty="0">
                           <a:latin typeface="Courier New" panose="02070309020205020404" pitchFamily="49" charset="0"/>
                         </a:rPr>
                         <a:t>percentile()</a:t>
                       </a:r>
                       <a:r>
-                        <a:rPr lang="en-IN" sz="2000"/>
+                        <a:rPr lang="en-IN" sz="2000" dirty="0"/>
                         <a:t>, </a:t>
                       </a:r>
                       <a:r>
-                        <a:rPr lang="en-IN" sz="2000">
+                        <a:rPr lang="en-IN" sz="2000" dirty="0" err="1">
                           <a:latin typeface="Courier New" panose="02070309020205020404" pitchFamily="49" charset="0"/>
                         </a:rPr>
-                        <a:t>corrcoef()</a:t>
+                        <a:t>corrcoef</a:t>
                       </a:r>
-                      <a:endParaRPr lang="en-IN" sz="2000"/>
+                      <a:r>
+                        <a:rPr lang="en-IN" sz="2000" dirty="0">
+                          <a:latin typeface="Courier New" panose="02070309020205020404" pitchFamily="49" charset="0"/>
+                        </a:rPr>
+                        <a:t>()</a:t>
+                      </a:r>
+                      <a:endParaRPr lang="en-IN" sz="2000" dirty="0"/>
                     </a:p>
                   </a:txBody>
                   <a:tcPr anchor="ctr">
